--- a/DML_Анализ_LogFiles_NTE200.pptx
+++ b/DML_Анализ_LogFiles_NTE200.pptx
@@ -17,6 +17,16 @@
     <p:sldId id="265" r:id="rId16"/>
     <p:sldId id="266" r:id="rId17"/>
     <p:sldId id="267" r:id="rId18"/>
+    <p:sldId id="268" r:id="rId19"/>
+    <p:sldId id="269" r:id="rId20"/>
+    <p:sldId id="270" r:id="rId21"/>
+    <p:sldId id="271" r:id="rId22"/>
+    <p:sldId id="272" r:id="rId23"/>
+    <p:sldId id="273" r:id="rId24"/>
+    <p:sldId id="274" r:id="rId25"/>
+    <p:sldId id="275" r:id="rId26"/>
+    <p:sldId id="276" r:id="rId27"/>
+    <p:sldId id="277" r:id="rId28"/>
   </p:sldIdLst>
   <p:sldSz cx="12189600" cy="6858000" type="screen4x3"/>
   <p:notesSz cx="6858000" cy="9144000"/>
@@ -7422,6 +7432,1952 @@
 </p:sld>
 </file>
 
+<file path=ppt/slides/slide13.xml><?xml version="1.0" encoding="utf-8"?>
+<p:sld xmlns:a="http://schemas.openxmlformats.org/drawingml/2006/main" xmlns:p="http://schemas.openxmlformats.org/presentationml/2006/main" xmlns:r="http://schemas.openxmlformats.org/officeDocument/2006/relationships">
+  <p:cSld>
+    <p:bg>
+      <p:bgPr>
+        <a:solidFill>
+          <a:srgbClr val="293136"/>
+        </a:solidFill>
+        <a:effectLst/>
+      </p:bgPr>
+    </p:bg>
+    <p:spTree>
+      <p:nvGrpSpPr>
+        <p:cNvPr id="1" name=""/>
+        <p:cNvGrpSpPr/>
+        <p:nvPr/>
+      </p:nvGrpSpPr>
+      <p:grpSpPr/>
+      <p:sp>
+        <p:nvSpPr>
+          <p:cNvPr id="2" name="Rectangle 1"/>
+          <p:cNvSpPr/>
+          <p:nvPr/>
+        </p:nvSpPr>
+        <p:spPr>
+          <a:xfrm>
+            <a:off x="0" y="2340000"/>
+            <a:ext cx="12189600" cy="2160000"/>
+          </a:xfrm>
+          <a:prstGeom prst="rect">
+            <a:avLst/>
+          </a:prstGeom>
+          <a:solidFill>
+            <a:srgbClr val="20272B"/>
+          </a:solidFill>
+          <a:ln>
+            <a:noFill/>
+          </a:ln>
+        </p:spPr>
+        <p:style>
+          <a:lnRef idx="1">
+            <a:schemeClr val="accent1"/>
+          </a:lnRef>
+          <a:fillRef idx="3">
+            <a:schemeClr val="accent1"/>
+          </a:fillRef>
+          <a:effectRef idx="2">
+            <a:schemeClr val="accent1"/>
+          </a:effectRef>
+          <a:fontRef idx="minor">
+            <a:schemeClr val="lt1"/>
+          </a:fontRef>
+        </p:style>
+        <p:txBody>
+          <a:bodyPr rtlCol="0" anchor="ctr"/>
+          <a:lstStyle/>
+          <a:p>
+            <a:pPr algn="ctr"/>
+          </a:p>
+        </p:txBody>
+      </p:sp>
+      <p:sp>
+        <p:nvSpPr>
+          <p:cNvPr id="3" name="Rectangle 2"/>
+          <p:cNvSpPr/>
+          <p:nvPr/>
+        </p:nvSpPr>
+        <p:spPr>
+          <a:xfrm>
+            <a:off x="0" y="2340000"/>
+            <a:ext cx="12189600" cy="108000"/>
+          </a:xfrm>
+          <a:prstGeom prst="rect">
+            <a:avLst/>
+          </a:prstGeom>
+          <a:solidFill>
+            <a:srgbClr val="3EF0AF"/>
+          </a:solidFill>
+          <a:ln>
+            <a:noFill/>
+          </a:ln>
+        </p:spPr>
+        <p:style>
+          <a:lnRef idx="1">
+            <a:schemeClr val="accent1"/>
+          </a:lnRef>
+          <a:fillRef idx="3">
+            <a:schemeClr val="accent1"/>
+          </a:fillRef>
+          <a:effectRef idx="2">
+            <a:schemeClr val="accent1"/>
+          </a:effectRef>
+          <a:fontRef idx="minor">
+            <a:schemeClr val="lt1"/>
+          </a:fontRef>
+        </p:style>
+        <p:txBody>
+          <a:bodyPr rtlCol="0" anchor="ctr"/>
+          <a:lstStyle/>
+          <a:p>
+            <a:pPr algn="ctr"/>
+          </a:p>
+        </p:txBody>
+      </p:sp>
+      <p:sp>
+        <p:nvSpPr>
+          <p:cNvPr id="4" name="TextBox 3"/>
+          <p:cNvSpPr txBox="1"/>
+          <p:nvPr/>
+        </p:nvSpPr>
+        <p:spPr>
+          <a:xfrm>
+            <a:off x="2520000" y="2628000"/>
+            <a:ext cx="9000000" cy="900000"/>
+          </a:xfrm>
+          <a:prstGeom prst="rect">
+            <a:avLst/>
+          </a:prstGeom>
+          <a:noFill/>
+        </p:spPr>
+        <p:txBody>
+          <a:bodyPr wrap="square">
+            <a:spAutoFit/>
+          </a:bodyPr>
+          <a:lstStyle/>
+          <a:p>
+            <a:pPr algn="l"/>
+            <a:r>
+              <a:rPr sz="4400" b="1" i="0">
+                <a:solidFill>
+                  <a:srgbClr val="FFFFFF"/>
+                </a:solidFill>
+              </a:rPr>
+              <a:t>ТЕМПЕРАТУРА</a:t>
+            </a:r>
+          </a:p>
+        </p:txBody>
+      </p:sp>
+      <p:sp>
+        <p:nvSpPr>
+          <p:cNvPr id="5" name="TextBox 4"/>
+          <p:cNvSpPr txBox="1"/>
+          <p:nvPr/>
+        </p:nvSpPr>
+        <p:spPr>
+          <a:xfrm>
+            <a:off x="2520000" y="3456000"/>
+            <a:ext cx="9000000" cy="720000"/>
+          </a:xfrm>
+          <a:prstGeom prst="rect">
+            <a:avLst/>
+          </a:prstGeom>
+          <a:noFill/>
+        </p:spPr>
+        <p:txBody>
+          <a:bodyPr wrap="square">
+            <a:spAutoFit/>
+          </a:bodyPr>
+          <a:lstStyle/>
+          <a:p>
+            <a:pPr algn="l"/>
+            <a:r>
+              <a:rPr sz="4400" b="1" i="0">
+                <a:solidFill>
+                  <a:srgbClr val="3EF0AF"/>
+                </a:solidFill>
+              </a:rPr>
+              <a:t>ПО ЦИЛИНДРАМ</a:t>
+            </a:r>
+          </a:p>
+        </p:txBody>
+      </p:sp>
+      <p:sp>
+        <p:nvSpPr>
+          <p:cNvPr id="6" name="TextBox 5"/>
+          <p:cNvSpPr txBox="1"/>
+          <p:nvPr/>
+        </p:nvSpPr>
+        <p:spPr>
+          <a:xfrm>
+            <a:off x="2520000" y="4320000"/>
+            <a:ext cx="9000000" cy="360000"/>
+          </a:xfrm>
+          <a:prstGeom prst="rect">
+            <a:avLst/>
+          </a:prstGeom>
+          <a:noFill/>
+        </p:spPr>
+        <p:txBody>
+          <a:bodyPr wrap="square">
+            <a:spAutoFit/>
+          </a:bodyPr>
+          <a:lstStyle/>
+          <a:p>
+            <a:pPr algn="l"/>
+            <a:r>
+              <a:rPr sz="1300" b="0" i="0">
+                <a:solidFill>
+                  <a:srgbClr val="667788"/>
+                </a:solidFill>
+              </a:rPr>
+              <a:t>А-банк (ECM144) vs В-банк (ECM1)  |  Все 9 агрегатов  |  16–21 мая 2026</a:t>
+            </a:r>
+          </a:p>
+        </p:txBody>
+      </p:sp>
+      <p:sp>
+        <p:nvSpPr>
+          <p:cNvPr id="7" name="TextBox 6"/>
+          <p:cNvSpPr txBox="1"/>
+          <p:nvPr/>
+        </p:nvSpPr>
+        <p:spPr>
+          <a:xfrm>
+            <a:off x="540000" y="2700000"/>
+            <a:ext cx="1800000" cy="1080000"/>
+          </a:xfrm>
+          <a:prstGeom prst="rect">
+            <a:avLst/>
+          </a:prstGeom>
+          <a:noFill/>
+        </p:spPr>
+        <p:txBody>
+          <a:bodyPr wrap="square">
+            <a:spAutoFit/>
+          </a:bodyPr>
+          <a:lstStyle/>
+          <a:p>
+            <a:pPr algn="l"/>
+            <a:r>
+              <a:rPr sz="7200" b="1" i="0">
+                <a:solidFill>
+                  <a:srgbClr val="3EF0AF"/>
+                </a:solidFill>
+              </a:rPr>
+              <a:t>09</a:t>
+            </a:r>
+          </a:p>
+        </p:txBody>
+      </p:sp>
+    </p:spTree>
+  </p:cSld>
+  <p:clrMapOvr>
+    <a:masterClrMapping/>
+  </p:clrMapOvr>
+</p:sld>
+</file>
+
+<file path=ppt/slides/slide14.xml><?xml version="1.0" encoding="utf-8"?>
+<p:sld xmlns:a="http://schemas.openxmlformats.org/drawingml/2006/main" xmlns:p="http://schemas.openxmlformats.org/presentationml/2006/main" xmlns:r="http://schemas.openxmlformats.org/officeDocument/2006/relationships">
+  <p:cSld>
+    <p:bg>
+      <p:bgPr>
+        <a:solidFill>
+          <a:srgbClr val="293136"/>
+        </a:solidFill>
+        <a:effectLst/>
+      </p:bgPr>
+    </p:bg>
+    <p:spTree>
+      <p:nvGrpSpPr>
+        <p:cNvPr id="1" name=""/>
+        <p:cNvGrpSpPr/>
+        <p:nvPr/>
+      </p:nvGrpSpPr>
+      <p:grpSpPr/>
+      <p:sp>
+        <p:nvSpPr>
+          <p:cNvPr id="2" name="Rectangle 1"/>
+          <p:cNvSpPr/>
+          <p:nvPr/>
+        </p:nvSpPr>
+        <p:spPr>
+          <a:xfrm>
+            <a:off x="0" y="0"/>
+            <a:ext cx="12189600" cy="720000"/>
+          </a:xfrm>
+          <a:prstGeom prst="rect">
+            <a:avLst/>
+          </a:prstGeom>
+          <a:solidFill>
+            <a:srgbClr val="20272B"/>
+          </a:solidFill>
+          <a:ln>
+            <a:noFill/>
+          </a:ln>
+        </p:spPr>
+        <p:style>
+          <a:lnRef idx="1">
+            <a:schemeClr val="accent1"/>
+          </a:lnRef>
+          <a:fillRef idx="3">
+            <a:schemeClr val="accent1"/>
+          </a:fillRef>
+          <a:effectRef idx="2">
+            <a:schemeClr val="accent1"/>
+          </a:effectRef>
+          <a:fontRef idx="minor">
+            <a:schemeClr val="lt1"/>
+          </a:fontRef>
+        </p:style>
+        <p:txBody>
+          <a:bodyPr rtlCol="0" anchor="ctr"/>
+          <a:lstStyle/>
+          <a:p>
+            <a:pPr algn="ctr"/>
+          </a:p>
+        </p:txBody>
+      </p:sp>
+      <p:sp>
+        <p:nvSpPr>
+          <p:cNvPr id="3" name="Rectangle 2"/>
+          <p:cNvSpPr/>
+          <p:nvPr/>
+        </p:nvSpPr>
+        <p:spPr>
+          <a:xfrm>
+            <a:off x="0" y="666000"/>
+            <a:ext cx="12189600" cy="43200"/>
+          </a:xfrm>
+          <a:prstGeom prst="rect">
+            <a:avLst/>
+          </a:prstGeom>
+          <a:solidFill>
+            <a:srgbClr val="3EF0AF"/>
+          </a:solidFill>
+          <a:ln>
+            <a:noFill/>
+          </a:ln>
+        </p:spPr>
+        <p:style>
+          <a:lnRef idx="1">
+            <a:schemeClr val="accent1"/>
+          </a:lnRef>
+          <a:fillRef idx="3">
+            <a:schemeClr val="accent1"/>
+          </a:fillRef>
+          <a:effectRef idx="2">
+            <a:schemeClr val="accent1"/>
+          </a:effectRef>
+          <a:fontRef idx="minor">
+            <a:schemeClr val="lt1"/>
+          </a:fontRef>
+        </p:style>
+        <p:txBody>
+          <a:bodyPr rtlCol="0" anchor="ctr"/>
+          <a:lstStyle/>
+          <a:p>
+            <a:pPr algn="ctr"/>
+          </a:p>
+        </p:txBody>
+      </p:sp>
+      <p:sp>
+        <p:nvSpPr>
+          <p:cNvPr id="4" name="TextBox 3"/>
+          <p:cNvSpPr txBox="1"/>
+          <p:nvPr/>
+        </p:nvSpPr>
+        <p:spPr>
+          <a:xfrm>
+            <a:off x="180000" y="36000"/>
+            <a:ext cx="11520000" cy="396000"/>
+          </a:xfrm>
+          <a:prstGeom prst="rect">
+            <a:avLst/>
+          </a:prstGeom>
+          <a:noFill/>
+        </p:spPr>
+        <p:txBody>
+          <a:bodyPr wrap="square">
+            <a:spAutoFit/>
+          </a:bodyPr>
+          <a:lstStyle/>
+          <a:p>
+            <a:pPr algn="l"/>
+            <a:r>
+              <a:rPr sz="1600" b="1" i="0">
+                <a:solidFill>
+                  <a:srgbClr val="FFFFFF"/>
+                </a:solidFill>
+              </a:rPr>
+              <a:t>ТЕМПЕРАТУРА ЦИЛИНДРОВ — АГРЕГАТ #43 (клапан)  |  16.05.2026</a:t>
+            </a:r>
+          </a:p>
+        </p:txBody>
+      </p:sp>
+      <p:sp>
+        <p:nvSpPr>
+          <p:cNvPr id="5" name="TextBox 4"/>
+          <p:cNvSpPr txBox="1"/>
+          <p:nvPr/>
+        </p:nvSpPr>
+        <p:spPr>
+          <a:xfrm>
+            <a:off x="180000" y="432000"/>
+            <a:ext cx="11520000" cy="234000"/>
+          </a:xfrm>
+          <a:prstGeom prst="rect">
+            <a:avLst/>
+          </a:prstGeom>
+          <a:noFill/>
+        </p:spPr>
+        <p:txBody>
+          <a:bodyPr wrap="square">
+            <a:spAutoFit/>
+          </a:bodyPr>
+          <a:lstStyle/>
+          <a:p>
+            <a:pPr algn="l"/>
+            <a:r>
+              <a:rPr sz="950" b="0" i="0">
+                <a:solidFill>
+                  <a:srgbClr val="667788"/>
+                </a:solidFill>
+              </a:rPr>
+              <a:t>А-банк (нечётные, ECM144) — В-банк (чётные, ECM1)  |  Индивидуальные ЕГТ по цилиндрам</a:t>
+            </a:r>
+          </a:p>
+        </p:txBody>
+      </p:sp>
+      <p:pic>
+        <p:nvPicPr>
+          <p:cNvPr id="6" name="Picture 5" descr="tmp23s4fo2y.png"/>
+          <p:cNvPicPr>
+            <a:picLocks noChangeAspect="1"/>
+          </p:cNvPicPr>
+          <p:nvPr/>
+        </p:nvPicPr>
+        <p:blipFill>
+          <a:blip r:embed="rId2"/>
+          <a:stretch>
+            <a:fillRect/>
+          </a:stretch>
+        </p:blipFill>
+        <p:spPr>
+          <a:xfrm>
+            <a:off x="108000" y="756000"/>
+            <a:ext cx="11952000" cy="5580000"/>
+          </a:xfrm>
+          <a:prstGeom prst="rect">
+            <a:avLst/>
+          </a:prstGeom>
+        </p:spPr>
+      </p:pic>
+      <p:sp>
+        <p:nvSpPr>
+          <p:cNvPr id="7" name="Rectangle 6"/>
+          <p:cNvSpPr/>
+          <p:nvPr/>
+        </p:nvSpPr>
+        <p:spPr>
+          <a:xfrm>
+            <a:off x="0" y="6372000"/>
+            <a:ext cx="12189600" cy="486000"/>
+          </a:xfrm>
+          <a:prstGeom prst="rect">
+            <a:avLst/>
+          </a:prstGeom>
+          <a:solidFill>
+            <a:srgbClr val="20272B"/>
+          </a:solidFill>
+          <a:ln w="15240">
+            <a:solidFill>
+              <a:srgbClr val="FF8C42"/>
+            </a:solidFill>
+          </a:ln>
+        </p:spPr>
+        <p:style>
+          <a:lnRef idx="1">
+            <a:schemeClr val="accent1"/>
+          </a:lnRef>
+          <a:fillRef idx="3">
+            <a:schemeClr val="accent1"/>
+          </a:fillRef>
+          <a:effectRef idx="2">
+            <a:schemeClr val="accent1"/>
+          </a:effectRef>
+          <a:fontRef idx="minor">
+            <a:schemeClr val="lt1"/>
+          </a:fontRef>
+        </p:style>
+        <p:txBody>
+          <a:bodyPr rtlCol="0" anchor="ctr"/>
+          <a:lstStyle/>
+          <a:p>
+            <a:pPr algn="ctr"/>
+          </a:p>
+        </p:txBody>
+      </p:sp>
+      <p:sp>
+        <p:nvSpPr>
+          <p:cNvPr id="8" name="TextBox 7"/>
+          <p:cNvSpPr txBox="1"/>
+          <p:nvPr/>
+        </p:nvSpPr>
+        <p:spPr>
+          <a:xfrm>
+            <a:off x="180000" y="6390000"/>
+            <a:ext cx="11700000" cy="450000"/>
+          </a:xfrm>
+          <a:prstGeom prst="rect">
+            <a:avLst/>
+          </a:prstGeom>
+          <a:noFill/>
+        </p:spPr>
+        <p:txBody>
+          <a:bodyPr wrap="square">
+            <a:spAutoFit/>
+          </a:bodyPr>
+          <a:lstStyle/>
+          <a:p>
+            <a:pPr algn="l"/>
+            <a:r>
+              <a:rPr sz="1000" b="1" i="0">
+                <a:solidFill>
+                  <a:srgbClr val="FF8C42"/>
+                </a:solidFill>
+              </a:rPr>
+              <a:t>ВЫВОД: В-банк горячее А-банка на 19°C в среднем. Цил.6 достигает 594°C — КРИТИЧНО. Агрегат с известным дефектом клапана — сравнение с нормой.</a:t>
+            </a:r>
+          </a:p>
+        </p:txBody>
+      </p:sp>
+    </p:spTree>
+  </p:cSld>
+  <p:clrMapOvr>
+    <a:masterClrMapping/>
+  </p:clrMapOvr>
+</p:sld>
+</file>
+
+<file path=ppt/slides/slide15.xml><?xml version="1.0" encoding="utf-8"?>
+<p:sld xmlns:a="http://schemas.openxmlformats.org/drawingml/2006/main" xmlns:p="http://schemas.openxmlformats.org/presentationml/2006/main" xmlns:r="http://schemas.openxmlformats.org/officeDocument/2006/relationships">
+  <p:cSld>
+    <p:bg>
+      <p:bgPr>
+        <a:solidFill>
+          <a:srgbClr val="293136"/>
+        </a:solidFill>
+        <a:effectLst/>
+      </p:bgPr>
+    </p:bg>
+    <p:spTree>
+      <p:nvGrpSpPr>
+        <p:cNvPr id="1" name=""/>
+        <p:cNvGrpSpPr/>
+        <p:nvPr/>
+      </p:nvGrpSpPr>
+      <p:grpSpPr/>
+      <p:sp>
+        <p:nvSpPr>
+          <p:cNvPr id="2" name="Rectangle 1"/>
+          <p:cNvSpPr/>
+          <p:nvPr/>
+        </p:nvSpPr>
+        <p:spPr>
+          <a:xfrm>
+            <a:off x="0" y="0"/>
+            <a:ext cx="12189600" cy="720000"/>
+          </a:xfrm>
+          <a:prstGeom prst="rect">
+            <a:avLst/>
+          </a:prstGeom>
+          <a:solidFill>
+            <a:srgbClr val="20272B"/>
+          </a:solidFill>
+          <a:ln>
+            <a:noFill/>
+          </a:ln>
+        </p:spPr>
+        <p:style>
+          <a:lnRef idx="1">
+            <a:schemeClr val="accent1"/>
+          </a:lnRef>
+          <a:fillRef idx="3">
+            <a:schemeClr val="accent1"/>
+          </a:fillRef>
+          <a:effectRef idx="2">
+            <a:schemeClr val="accent1"/>
+          </a:effectRef>
+          <a:fontRef idx="minor">
+            <a:schemeClr val="lt1"/>
+          </a:fontRef>
+        </p:style>
+        <p:txBody>
+          <a:bodyPr rtlCol="0" anchor="ctr"/>
+          <a:lstStyle/>
+          <a:p>
+            <a:pPr algn="ctr"/>
+          </a:p>
+        </p:txBody>
+      </p:sp>
+      <p:sp>
+        <p:nvSpPr>
+          <p:cNvPr id="3" name="Rectangle 2"/>
+          <p:cNvSpPr/>
+          <p:nvPr/>
+        </p:nvSpPr>
+        <p:spPr>
+          <a:xfrm>
+            <a:off x="0" y="666000"/>
+            <a:ext cx="12189600" cy="43200"/>
+          </a:xfrm>
+          <a:prstGeom prst="rect">
+            <a:avLst/>
+          </a:prstGeom>
+          <a:solidFill>
+            <a:srgbClr val="3EF0AF"/>
+          </a:solidFill>
+          <a:ln>
+            <a:noFill/>
+          </a:ln>
+        </p:spPr>
+        <p:style>
+          <a:lnRef idx="1">
+            <a:schemeClr val="accent1"/>
+          </a:lnRef>
+          <a:fillRef idx="3">
+            <a:schemeClr val="accent1"/>
+          </a:fillRef>
+          <a:effectRef idx="2">
+            <a:schemeClr val="accent1"/>
+          </a:effectRef>
+          <a:fontRef idx="minor">
+            <a:schemeClr val="lt1"/>
+          </a:fontRef>
+        </p:style>
+        <p:txBody>
+          <a:bodyPr rtlCol="0" anchor="ctr"/>
+          <a:lstStyle/>
+          <a:p>
+            <a:pPr algn="ctr"/>
+          </a:p>
+        </p:txBody>
+      </p:sp>
+      <p:sp>
+        <p:nvSpPr>
+          <p:cNvPr id="4" name="TextBox 3"/>
+          <p:cNvSpPr txBox="1"/>
+          <p:nvPr/>
+        </p:nvSpPr>
+        <p:spPr>
+          <a:xfrm>
+            <a:off x="180000" y="36000"/>
+            <a:ext cx="11520000" cy="396000"/>
+          </a:xfrm>
+          <a:prstGeom prst="rect">
+            <a:avLst/>
+          </a:prstGeom>
+          <a:noFill/>
+        </p:spPr>
+        <p:txBody>
+          <a:bodyPr wrap="square">
+            <a:spAutoFit/>
+          </a:bodyPr>
+          <a:lstStyle/>
+          <a:p>
+            <a:pPr algn="l"/>
+            <a:r>
+              <a:rPr sz="1600" b="1" i="0">
+                <a:solidFill>
+                  <a:srgbClr val="FFFFFF"/>
+                </a:solidFill>
+              </a:rPr>
+              <a:t>ТЕМПЕРАТУРА ЦИЛИНДРОВ — АГРЕГАТ #45  |  18.05.2026</a:t>
+            </a:r>
+          </a:p>
+        </p:txBody>
+      </p:sp>
+      <p:sp>
+        <p:nvSpPr>
+          <p:cNvPr id="5" name="TextBox 4"/>
+          <p:cNvSpPr txBox="1"/>
+          <p:nvPr/>
+        </p:nvSpPr>
+        <p:spPr>
+          <a:xfrm>
+            <a:off x="180000" y="432000"/>
+            <a:ext cx="11520000" cy="234000"/>
+          </a:xfrm>
+          <a:prstGeom prst="rect">
+            <a:avLst/>
+          </a:prstGeom>
+          <a:noFill/>
+        </p:spPr>
+        <p:txBody>
+          <a:bodyPr wrap="square">
+            <a:spAutoFit/>
+          </a:bodyPr>
+          <a:lstStyle/>
+          <a:p>
+            <a:pPr algn="l"/>
+            <a:r>
+              <a:rPr sz="950" b="0" i="0">
+                <a:solidFill>
+                  <a:srgbClr val="667788"/>
+                </a:solidFill>
+              </a:rPr>
+              <a:t>А-банк (нечётные, ECM144) — В-банк (чётные, ECM1)  |  Индивидуальные ЕГТ по цилиндрам</a:t>
+            </a:r>
+          </a:p>
+        </p:txBody>
+      </p:sp>
+      <p:pic>
+        <p:nvPicPr>
+          <p:cNvPr id="6" name="Picture 5" descr="tmp2ka67x5s.png"/>
+          <p:cNvPicPr>
+            <a:picLocks noChangeAspect="1"/>
+          </p:cNvPicPr>
+          <p:nvPr/>
+        </p:nvPicPr>
+        <p:blipFill>
+          <a:blip r:embed="rId2"/>
+          <a:stretch>
+            <a:fillRect/>
+          </a:stretch>
+        </p:blipFill>
+        <p:spPr>
+          <a:xfrm>
+            <a:off x="108000" y="756000"/>
+            <a:ext cx="11952000" cy="5580000"/>
+          </a:xfrm>
+          <a:prstGeom prst="rect">
+            <a:avLst/>
+          </a:prstGeom>
+        </p:spPr>
+      </p:pic>
+      <p:sp>
+        <p:nvSpPr>
+          <p:cNvPr id="7" name="Rectangle 6"/>
+          <p:cNvSpPr/>
+          <p:nvPr/>
+        </p:nvSpPr>
+        <p:spPr>
+          <a:xfrm>
+            <a:off x="0" y="6372000"/>
+            <a:ext cx="12189600" cy="486000"/>
+          </a:xfrm>
+          <a:prstGeom prst="rect">
+            <a:avLst/>
+          </a:prstGeom>
+          <a:solidFill>
+            <a:srgbClr val="20272B"/>
+          </a:solidFill>
+          <a:ln w="15240">
+            <a:solidFill>
+              <a:srgbClr val="FF8C42"/>
+            </a:solidFill>
+          </a:ln>
+        </p:spPr>
+        <p:style>
+          <a:lnRef idx="1">
+            <a:schemeClr val="accent1"/>
+          </a:lnRef>
+          <a:fillRef idx="3">
+            <a:schemeClr val="accent1"/>
+          </a:fillRef>
+          <a:effectRef idx="2">
+            <a:schemeClr val="accent1"/>
+          </a:effectRef>
+          <a:fontRef idx="minor">
+            <a:schemeClr val="lt1"/>
+          </a:fontRef>
+        </p:style>
+        <p:txBody>
+          <a:bodyPr rtlCol="0" anchor="ctr"/>
+          <a:lstStyle/>
+          <a:p>
+            <a:pPr algn="ctr"/>
+          </a:p>
+        </p:txBody>
+      </p:sp>
+      <p:sp>
+        <p:nvSpPr>
+          <p:cNvPr id="8" name="TextBox 7"/>
+          <p:cNvSpPr txBox="1"/>
+          <p:nvPr/>
+        </p:nvSpPr>
+        <p:spPr>
+          <a:xfrm>
+            <a:off x="180000" y="6390000"/>
+            <a:ext cx="11700000" cy="450000"/>
+          </a:xfrm>
+          <a:prstGeom prst="rect">
+            <a:avLst/>
+          </a:prstGeom>
+          <a:noFill/>
+        </p:spPr>
+        <p:txBody>
+          <a:bodyPr wrap="square">
+            <a:spAutoFit/>
+          </a:bodyPr>
+          <a:lstStyle/>
+          <a:p>
+            <a:pPr algn="l"/>
+            <a:r>
+              <a:rPr sz="1000" b="1" i="0">
+                <a:solidFill>
+                  <a:srgbClr val="FF8C42"/>
+                </a:solidFill>
+              </a:rPr>
+              <a:t>ВЫВОД: В-банк горячее А-банка на 25°C в среднем. Цил.2 достигает 521°C — ВНИМАНИЕ.</a:t>
+            </a:r>
+          </a:p>
+        </p:txBody>
+      </p:sp>
+    </p:spTree>
+  </p:cSld>
+  <p:clrMapOvr>
+    <a:masterClrMapping/>
+  </p:clrMapOvr>
+</p:sld>
+</file>
+
+<file path=ppt/slides/slide16.xml><?xml version="1.0" encoding="utf-8"?>
+<p:sld xmlns:a="http://schemas.openxmlformats.org/drawingml/2006/main" xmlns:p="http://schemas.openxmlformats.org/presentationml/2006/main" xmlns:r="http://schemas.openxmlformats.org/officeDocument/2006/relationships">
+  <p:cSld>
+    <p:bg>
+      <p:bgPr>
+        <a:solidFill>
+          <a:srgbClr val="293136"/>
+        </a:solidFill>
+        <a:effectLst/>
+      </p:bgPr>
+    </p:bg>
+    <p:spTree>
+      <p:nvGrpSpPr>
+        <p:cNvPr id="1" name=""/>
+        <p:cNvGrpSpPr/>
+        <p:nvPr/>
+      </p:nvGrpSpPr>
+      <p:grpSpPr/>
+      <p:sp>
+        <p:nvSpPr>
+          <p:cNvPr id="2" name="Rectangle 1"/>
+          <p:cNvSpPr/>
+          <p:nvPr/>
+        </p:nvSpPr>
+        <p:spPr>
+          <a:xfrm>
+            <a:off x="0" y="0"/>
+            <a:ext cx="12189600" cy="720000"/>
+          </a:xfrm>
+          <a:prstGeom prst="rect">
+            <a:avLst/>
+          </a:prstGeom>
+          <a:solidFill>
+            <a:srgbClr val="20272B"/>
+          </a:solidFill>
+          <a:ln>
+            <a:noFill/>
+          </a:ln>
+        </p:spPr>
+        <p:style>
+          <a:lnRef idx="1">
+            <a:schemeClr val="accent1"/>
+          </a:lnRef>
+          <a:fillRef idx="3">
+            <a:schemeClr val="accent1"/>
+          </a:fillRef>
+          <a:effectRef idx="2">
+            <a:schemeClr val="accent1"/>
+          </a:effectRef>
+          <a:fontRef idx="minor">
+            <a:schemeClr val="lt1"/>
+          </a:fontRef>
+        </p:style>
+        <p:txBody>
+          <a:bodyPr rtlCol="0" anchor="ctr"/>
+          <a:lstStyle/>
+          <a:p>
+            <a:pPr algn="ctr"/>
+          </a:p>
+        </p:txBody>
+      </p:sp>
+      <p:sp>
+        <p:nvSpPr>
+          <p:cNvPr id="3" name="Rectangle 2"/>
+          <p:cNvSpPr/>
+          <p:nvPr/>
+        </p:nvSpPr>
+        <p:spPr>
+          <a:xfrm>
+            <a:off x="0" y="666000"/>
+            <a:ext cx="12189600" cy="43200"/>
+          </a:xfrm>
+          <a:prstGeom prst="rect">
+            <a:avLst/>
+          </a:prstGeom>
+          <a:solidFill>
+            <a:srgbClr val="3EF0AF"/>
+          </a:solidFill>
+          <a:ln>
+            <a:noFill/>
+          </a:ln>
+        </p:spPr>
+        <p:style>
+          <a:lnRef idx="1">
+            <a:schemeClr val="accent1"/>
+          </a:lnRef>
+          <a:fillRef idx="3">
+            <a:schemeClr val="accent1"/>
+          </a:fillRef>
+          <a:effectRef idx="2">
+            <a:schemeClr val="accent1"/>
+          </a:effectRef>
+          <a:fontRef idx="minor">
+            <a:schemeClr val="lt1"/>
+          </a:fontRef>
+        </p:style>
+        <p:txBody>
+          <a:bodyPr rtlCol="0" anchor="ctr"/>
+          <a:lstStyle/>
+          <a:p>
+            <a:pPr algn="ctr"/>
+          </a:p>
+        </p:txBody>
+      </p:sp>
+      <p:sp>
+        <p:nvSpPr>
+          <p:cNvPr id="4" name="TextBox 3"/>
+          <p:cNvSpPr txBox="1"/>
+          <p:nvPr/>
+        </p:nvSpPr>
+        <p:spPr>
+          <a:xfrm>
+            <a:off x="180000" y="36000"/>
+            <a:ext cx="11520000" cy="396000"/>
+          </a:xfrm>
+          <a:prstGeom prst="rect">
+            <a:avLst/>
+          </a:prstGeom>
+          <a:noFill/>
+        </p:spPr>
+        <p:txBody>
+          <a:bodyPr wrap="square">
+            <a:spAutoFit/>
+          </a:bodyPr>
+          <a:lstStyle/>
+          <a:p>
+            <a:pPr algn="l"/>
+            <a:r>
+              <a:rPr sz="1600" b="1" i="0">
+                <a:solidFill>
+                  <a:srgbClr val="FFFFFF"/>
+                </a:solidFill>
+              </a:rPr>
+              <a:t>ТЕМПЕРАТУРА ЦИЛИНДРОВ — АГРЕГАТ #50  |  19.05.2026</a:t>
+            </a:r>
+          </a:p>
+        </p:txBody>
+      </p:sp>
+      <p:sp>
+        <p:nvSpPr>
+          <p:cNvPr id="5" name="TextBox 4"/>
+          <p:cNvSpPr txBox="1"/>
+          <p:nvPr/>
+        </p:nvSpPr>
+        <p:spPr>
+          <a:xfrm>
+            <a:off x="180000" y="432000"/>
+            <a:ext cx="11520000" cy="234000"/>
+          </a:xfrm>
+          <a:prstGeom prst="rect">
+            <a:avLst/>
+          </a:prstGeom>
+          <a:noFill/>
+        </p:spPr>
+        <p:txBody>
+          <a:bodyPr wrap="square">
+            <a:spAutoFit/>
+          </a:bodyPr>
+          <a:lstStyle/>
+          <a:p>
+            <a:pPr algn="l"/>
+            <a:r>
+              <a:rPr sz="950" b="0" i="0">
+                <a:solidFill>
+                  <a:srgbClr val="667788"/>
+                </a:solidFill>
+              </a:rPr>
+              <a:t>А-банк (нечётные, ECM144) — В-банк (чётные, ECM1)  |  Индивидуальные ЕГТ по цилиндрам</a:t>
+            </a:r>
+          </a:p>
+        </p:txBody>
+      </p:sp>
+      <p:pic>
+        <p:nvPicPr>
+          <p:cNvPr id="6" name="Picture 5" descr="tmpwh9etp7z.png"/>
+          <p:cNvPicPr>
+            <a:picLocks noChangeAspect="1"/>
+          </p:cNvPicPr>
+          <p:nvPr/>
+        </p:nvPicPr>
+        <p:blipFill>
+          <a:blip r:embed="rId2"/>
+          <a:stretch>
+            <a:fillRect/>
+          </a:stretch>
+        </p:blipFill>
+        <p:spPr>
+          <a:xfrm>
+            <a:off x="108000" y="756000"/>
+            <a:ext cx="11952000" cy="5580000"/>
+          </a:xfrm>
+          <a:prstGeom prst="rect">
+            <a:avLst/>
+          </a:prstGeom>
+        </p:spPr>
+      </p:pic>
+      <p:sp>
+        <p:nvSpPr>
+          <p:cNvPr id="7" name="Rectangle 6"/>
+          <p:cNvSpPr/>
+          <p:nvPr/>
+        </p:nvSpPr>
+        <p:spPr>
+          <a:xfrm>
+            <a:off x="0" y="6372000"/>
+            <a:ext cx="12189600" cy="486000"/>
+          </a:xfrm>
+          <a:prstGeom prst="rect">
+            <a:avLst/>
+          </a:prstGeom>
+          <a:solidFill>
+            <a:srgbClr val="20272B"/>
+          </a:solidFill>
+          <a:ln w="15240">
+            <a:solidFill>
+              <a:srgbClr val="FF8C42"/>
+            </a:solidFill>
+          </a:ln>
+        </p:spPr>
+        <p:style>
+          <a:lnRef idx="1">
+            <a:schemeClr val="accent1"/>
+          </a:lnRef>
+          <a:fillRef idx="3">
+            <a:schemeClr val="accent1"/>
+          </a:fillRef>
+          <a:effectRef idx="2">
+            <a:schemeClr val="accent1"/>
+          </a:effectRef>
+          <a:fontRef idx="minor">
+            <a:schemeClr val="lt1"/>
+          </a:fontRef>
+        </p:style>
+        <p:txBody>
+          <a:bodyPr rtlCol="0" anchor="ctr"/>
+          <a:lstStyle/>
+          <a:p>
+            <a:pPr algn="ctr"/>
+          </a:p>
+        </p:txBody>
+      </p:sp>
+      <p:sp>
+        <p:nvSpPr>
+          <p:cNvPr id="8" name="TextBox 7"/>
+          <p:cNvSpPr txBox="1"/>
+          <p:nvPr/>
+        </p:nvSpPr>
+        <p:spPr>
+          <a:xfrm>
+            <a:off x="180000" y="6390000"/>
+            <a:ext cx="11700000" cy="450000"/>
+          </a:xfrm>
+          <a:prstGeom prst="rect">
+            <a:avLst/>
+          </a:prstGeom>
+          <a:noFill/>
+        </p:spPr>
+        <p:txBody>
+          <a:bodyPr wrap="square">
+            <a:spAutoFit/>
+          </a:bodyPr>
+          <a:lstStyle/>
+          <a:p>
+            <a:pPr algn="l"/>
+            <a:r>
+              <a:rPr sz="1000" b="1" i="0">
+                <a:solidFill>
+                  <a:srgbClr val="FF8C42"/>
+                </a:solidFill>
+              </a:rPr>
+              <a:t>ВЫВОД: В-банк горячее А-банка на 13°C в среднем. Цил.10 достигает 556°C — КРИТИЧНО.</a:t>
+            </a:r>
+          </a:p>
+        </p:txBody>
+      </p:sp>
+    </p:spTree>
+  </p:cSld>
+  <p:clrMapOvr>
+    <a:masterClrMapping/>
+  </p:clrMapOvr>
+</p:sld>
+</file>
+
+<file path=ppt/slides/slide17.xml><?xml version="1.0" encoding="utf-8"?>
+<p:sld xmlns:a="http://schemas.openxmlformats.org/drawingml/2006/main" xmlns:p="http://schemas.openxmlformats.org/presentationml/2006/main" xmlns:r="http://schemas.openxmlformats.org/officeDocument/2006/relationships">
+  <p:cSld>
+    <p:bg>
+      <p:bgPr>
+        <a:solidFill>
+          <a:srgbClr val="293136"/>
+        </a:solidFill>
+        <a:effectLst/>
+      </p:bgPr>
+    </p:bg>
+    <p:spTree>
+      <p:nvGrpSpPr>
+        <p:cNvPr id="1" name=""/>
+        <p:cNvGrpSpPr/>
+        <p:nvPr/>
+      </p:nvGrpSpPr>
+      <p:grpSpPr/>
+      <p:sp>
+        <p:nvSpPr>
+          <p:cNvPr id="2" name="Rectangle 1"/>
+          <p:cNvSpPr/>
+          <p:nvPr/>
+        </p:nvSpPr>
+        <p:spPr>
+          <a:xfrm>
+            <a:off x="0" y="0"/>
+            <a:ext cx="12189600" cy="720000"/>
+          </a:xfrm>
+          <a:prstGeom prst="rect">
+            <a:avLst/>
+          </a:prstGeom>
+          <a:solidFill>
+            <a:srgbClr val="20272B"/>
+          </a:solidFill>
+          <a:ln>
+            <a:noFill/>
+          </a:ln>
+        </p:spPr>
+        <p:style>
+          <a:lnRef idx="1">
+            <a:schemeClr val="accent1"/>
+          </a:lnRef>
+          <a:fillRef idx="3">
+            <a:schemeClr val="accent1"/>
+          </a:fillRef>
+          <a:effectRef idx="2">
+            <a:schemeClr val="accent1"/>
+          </a:effectRef>
+          <a:fontRef idx="minor">
+            <a:schemeClr val="lt1"/>
+          </a:fontRef>
+        </p:style>
+        <p:txBody>
+          <a:bodyPr rtlCol="0" anchor="ctr"/>
+          <a:lstStyle/>
+          <a:p>
+            <a:pPr algn="ctr"/>
+          </a:p>
+        </p:txBody>
+      </p:sp>
+      <p:sp>
+        <p:nvSpPr>
+          <p:cNvPr id="3" name="Rectangle 2"/>
+          <p:cNvSpPr/>
+          <p:nvPr/>
+        </p:nvSpPr>
+        <p:spPr>
+          <a:xfrm>
+            <a:off x="0" y="666000"/>
+            <a:ext cx="12189600" cy="43200"/>
+          </a:xfrm>
+          <a:prstGeom prst="rect">
+            <a:avLst/>
+          </a:prstGeom>
+          <a:solidFill>
+            <a:srgbClr val="3EF0AF"/>
+          </a:solidFill>
+          <a:ln>
+            <a:noFill/>
+          </a:ln>
+        </p:spPr>
+        <p:style>
+          <a:lnRef idx="1">
+            <a:schemeClr val="accent1"/>
+          </a:lnRef>
+          <a:fillRef idx="3">
+            <a:schemeClr val="accent1"/>
+          </a:fillRef>
+          <a:effectRef idx="2">
+            <a:schemeClr val="accent1"/>
+          </a:effectRef>
+          <a:fontRef idx="minor">
+            <a:schemeClr val="lt1"/>
+          </a:fontRef>
+        </p:style>
+        <p:txBody>
+          <a:bodyPr rtlCol="0" anchor="ctr"/>
+          <a:lstStyle/>
+          <a:p>
+            <a:pPr algn="ctr"/>
+          </a:p>
+        </p:txBody>
+      </p:sp>
+      <p:sp>
+        <p:nvSpPr>
+          <p:cNvPr id="4" name="TextBox 3"/>
+          <p:cNvSpPr txBox="1"/>
+          <p:nvPr/>
+        </p:nvSpPr>
+        <p:spPr>
+          <a:xfrm>
+            <a:off x="180000" y="36000"/>
+            <a:ext cx="11520000" cy="396000"/>
+          </a:xfrm>
+          <a:prstGeom prst="rect">
+            <a:avLst/>
+          </a:prstGeom>
+          <a:noFill/>
+        </p:spPr>
+        <p:txBody>
+          <a:bodyPr wrap="square">
+            <a:spAutoFit/>
+          </a:bodyPr>
+          <a:lstStyle/>
+          <a:p>
+            <a:pPr algn="l"/>
+            <a:r>
+              <a:rPr sz="1600" b="1" i="0">
+                <a:solidFill>
+                  <a:srgbClr val="FFFFFF"/>
+                </a:solidFill>
+              </a:rPr>
+              <a:t>ТЕМПЕРАТУРА ЦИЛИНДРОВ — АГРЕГАТ #52  |  18.05.2026</a:t>
+            </a:r>
+          </a:p>
+        </p:txBody>
+      </p:sp>
+      <p:sp>
+        <p:nvSpPr>
+          <p:cNvPr id="5" name="TextBox 4"/>
+          <p:cNvSpPr txBox="1"/>
+          <p:nvPr/>
+        </p:nvSpPr>
+        <p:spPr>
+          <a:xfrm>
+            <a:off x="180000" y="432000"/>
+            <a:ext cx="11520000" cy="234000"/>
+          </a:xfrm>
+          <a:prstGeom prst="rect">
+            <a:avLst/>
+          </a:prstGeom>
+          <a:noFill/>
+        </p:spPr>
+        <p:txBody>
+          <a:bodyPr wrap="square">
+            <a:spAutoFit/>
+          </a:bodyPr>
+          <a:lstStyle/>
+          <a:p>
+            <a:pPr algn="l"/>
+            <a:r>
+              <a:rPr sz="950" b="0" i="0">
+                <a:solidFill>
+                  <a:srgbClr val="667788"/>
+                </a:solidFill>
+              </a:rPr>
+              <a:t>А-банк (нечётные, ECM144) — В-банк (чётные, ECM1)  |  Индивидуальные ЕГТ по цилиндрам</a:t>
+            </a:r>
+          </a:p>
+        </p:txBody>
+      </p:sp>
+      <p:pic>
+        <p:nvPicPr>
+          <p:cNvPr id="6" name="Picture 5" descr="tmpmojc_8lp.png"/>
+          <p:cNvPicPr>
+            <a:picLocks noChangeAspect="1"/>
+          </p:cNvPicPr>
+          <p:nvPr/>
+        </p:nvPicPr>
+        <p:blipFill>
+          <a:blip r:embed="rId2"/>
+          <a:stretch>
+            <a:fillRect/>
+          </a:stretch>
+        </p:blipFill>
+        <p:spPr>
+          <a:xfrm>
+            <a:off x="108000" y="756000"/>
+            <a:ext cx="11952000" cy="5580000"/>
+          </a:xfrm>
+          <a:prstGeom prst="rect">
+            <a:avLst/>
+          </a:prstGeom>
+        </p:spPr>
+      </p:pic>
+      <p:sp>
+        <p:nvSpPr>
+          <p:cNvPr id="7" name="Rectangle 6"/>
+          <p:cNvSpPr/>
+          <p:nvPr/>
+        </p:nvSpPr>
+        <p:spPr>
+          <a:xfrm>
+            <a:off x="0" y="6372000"/>
+            <a:ext cx="12189600" cy="486000"/>
+          </a:xfrm>
+          <a:prstGeom prst="rect">
+            <a:avLst/>
+          </a:prstGeom>
+          <a:solidFill>
+            <a:srgbClr val="20272B"/>
+          </a:solidFill>
+          <a:ln w="15240">
+            <a:solidFill>
+              <a:srgbClr val="FF8C42"/>
+            </a:solidFill>
+          </a:ln>
+        </p:spPr>
+        <p:style>
+          <a:lnRef idx="1">
+            <a:schemeClr val="accent1"/>
+          </a:lnRef>
+          <a:fillRef idx="3">
+            <a:schemeClr val="accent1"/>
+          </a:fillRef>
+          <a:effectRef idx="2">
+            <a:schemeClr val="accent1"/>
+          </a:effectRef>
+          <a:fontRef idx="minor">
+            <a:schemeClr val="lt1"/>
+          </a:fontRef>
+        </p:style>
+        <p:txBody>
+          <a:bodyPr rtlCol="0" anchor="ctr"/>
+          <a:lstStyle/>
+          <a:p>
+            <a:pPr algn="ctr"/>
+          </a:p>
+        </p:txBody>
+      </p:sp>
+      <p:sp>
+        <p:nvSpPr>
+          <p:cNvPr id="8" name="TextBox 7"/>
+          <p:cNvSpPr txBox="1"/>
+          <p:nvPr/>
+        </p:nvSpPr>
+        <p:spPr>
+          <a:xfrm>
+            <a:off x="180000" y="6390000"/>
+            <a:ext cx="11700000" cy="450000"/>
+          </a:xfrm>
+          <a:prstGeom prst="rect">
+            <a:avLst/>
+          </a:prstGeom>
+          <a:noFill/>
+        </p:spPr>
+        <p:txBody>
+          <a:bodyPr wrap="square">
+            <a:spAutoFit/>
+          </a:bodyPr>
+          <a:lstStyle/>
+          <a:p>
+            <a:pPr algn="l"/>
+            <a:r>
+              <a:rPr sz="1000" b="1" i="0">
+                <a:solidFill>
+                  <a:srgbClr val="FF8C42"/>
+                </a:solidFill>
+              </a:rPr>
+              <a:t>ВЫВОД: А-банк горячее В-банка на 16°C в среднем. Цил.12 достигает 526°C — ВНИМАНИЕ.</a:t>
+            </a:r>
+          </a:p>
+        </p:txBody>
+      </p:sp>
+    </p:spTree>
+  </p:cSld>
+  <p:clrMapOvr>
+    <a:masterClrMapping/>
+  </p:clrMapOvr>
+</p:sld>
+</file>
+
+<file path=ppt/slides/slide18.xml><?xml version="1.0" encoding="utf-8"?>
+<p:sld xmlns:a="http://schemas.openxmlformats.org/drawingml/2006/main" xmlns:p="http://schemas.openxmlformats.org/presentationml/2006/main" xmlns:r="http://schemas.openxmlformats.org/officeDocument/2006/relationships">
+  <p:cSld>
+    <p:bg>
+      <p:bgPr>
+        <a:solidFill>
+          <a:srgbClr val="293136"/>
+        </a:solidFill>
+        <a:effectLst/>
+      </p:bgPr>
+    </p:bg>
+    <p:spTree>
+      <p:nvGrpSpPr>
+        <p:cNvPr id="1" name=""/>
+        <p:cNvGrpSpPr/>
+        <p:nvPr/>
+      </p:nvGrpSpPr>
+      <p:grpSpPr/>
+      <p:sp>
+        <p:nvSpPr>
+          <p:cNvPr id="2" name="Rectangle 1"/>
+          <p:cNvSpPr/>
+          <p:nvPr/>
+        </p:nvSpPr>
+        <p:spPr>
+          <a:xfrm>
+            <a:off x="0" y="0"/>
+            <a:ext cx="12189600" cy="720000"/>
+          </a:xfrm>
+          <a:prstGeom prst="rect">
+            <a:avLst/>
+          </a:prstGeom>
+          <a:solidFill>
+            <a:srgbClr val="20272B"/>
+          </a:solidFill>
+          <a:ln>
+            <a:noFill/>
+          </a:ln>
+        </p:spPr>
+        <p:style>
+          <a:lnRef idx="1">
+            <a:schemeClr val="accent1"/>
+          </a:lnRef>
+          <a:fillRef idx="3">
+            <a:schemeClr val="accent1"/>
+          </a:fillRef>
+          <a:effectRef idx="2">
+            <a:schemeClr val="accent1"/>
+          </a:effectRef>
+          <a:fontRef idx="minor">
+            <a:schemeClr val="lt1"/>
+          </a:fontRef>
+        </p:style>
+        <p:txBody>
+          <a:bodyPr rtlCol="0" anchor="ctr"/>
+          <a:lstStyle/>
+          <a:p>
+            <a:pPr algn="ctr"/>
+          </a:p>
+        </p:txBody>
+      </p:sp>
+      <p:sp>
+        <p:nvSpPr>
+          <p:cNvPr id="3" name="Rectangle 2"/>
+          <p:cNvSpPr/>
+          <p:nvPr/>
+        </p:nvSpPr>
+        <p:spPr>
+          <a:xfrm>
+            <a:off x="0" y="666000"/>
+            <a:ext cx="12189600" cy="43200"/>
+          </a:xfrm>
+          <a:prstGeom prst="rect">
+            <a:avLst/>
+          </a:prstGeom>
+          <a:solidFill>
+            <a:srgbClr val="3EF0AF"/>
+          </a:solidFill>
+          <a:ln>
+            <a:noFill/>
+          </a:ln>
+        </p:spPr>
+        <p:style>
+          <a:lnRef idx="1">
+            <a:schemeClr val="accent1"/>
+          </a:lnRef>
+          <a:fillRef idx="3">
+            <a:schemeClr val="accent1"/>
+          </a:fillRef>
+          <a:effectRef idx="2">
+            <a:schemeClr val="accent1"/>
+          </a:effectRef>
+          <a:fontRef idx="minor">
+            <a:schemeClr val="lt1"/>
+          </a:fontRef>
+        </p:style>
+        <p:txBody>
+          <a:bodyPr rtlCol="0" anchor="ctr"/>
+          <a:lstStyle/>
+          <a:p>
+            <a:pPr algn="ctr"/>
+          </a:p>
+        </p:txBody>
+      </p:sp>
+      <p:sp>
+        <p:nvSpPr>
+          <p:cNvPr id="4" name="TextBox 3"/>
+          <p:cNvSpPr txBox="1"/>
+          <p:nvPr/>
+        </p:nvSpPr>
+        <p:spPr>
+          <a:xfrm>
+            <a:off x="180000" y="36000"/>
+            <a:ext cx="11520000" cy="396000"/>
+          </a:xfrm>
+          <a:prstGeom prst="rect">
+            <a:avLst/>
+          </a:prstGeom>
+          <a:noFill/>
+        </p:spPr>
+        <p:txBody>
+          <a:bodyPr wrap="square">
+            <a:spAutoFit/>
+          </a:bodyPr>
+          <a:lstStyle/>
+          <a:p>
+            <a:pPr algn="l"/>
+            <a:r>
+              <a:rPr sz="1600" b="1" i="0">
+                <a:solidFill>
+                  <a:srgbClr val="FFFFFF"/>
+                </a:solidFill>
+              </a:rPr>
+              <a:t>ТЕМПЕРАТУРА ЦИЛИНДРОВ — АГРЕГАТ #56  |  19.05.2026</a:t>
+            </a:r>
+          </a:p>
+        </p:txBody>
+      </p:sp>
+      <p:sp>
+        <p:nvSpPr>
+          <p:cNvPr id="5" name="TextBox 4"/>
+          <p:cNvSpPr txBox="1"/>
+          <p:nvPr/>
+        </p:nvSpPr>
+        <p:spPr>
+          <a:xfrm>
+            <a:off x="180000" y="432000"/>
+            <a:ext cx="11520000" cy="234000"/>
+          </a:xfrm>
+          <a:prstGeom prst="rect">
+            <a:avLst/>
+          </a:prstGeom>
+          <a:noFill/>
+        </p:spPr>
+        <p:txBody>
+          <a:bodyPr wrap="square">
+            <a:spAutoFit/>
+          </a:bodyPr>
+          <a:lstStyle/>
+          <a:p>
+            <a:pPr algn="l"/>
+            <a:r>
+              <a:rPr sz="950" b="0" i="0">
+                <a:solidFill>
+                  <a:srgbClr val="667788"/>
+                </a:solidFill>
+              </a:rPr>
+              <a:t>А-банк (нечётные, ECM144) — В-банк (чётные, ECM1)  |  Индивидуальные ЕГТ по цилиндрам</a:t>
+            </a:r>
+          </a:p>
+        </p:txBody>
+      </p:sp>
+      <p:pic>
+        <p:nvPicPr>
+          <p:cNvPr id="6" name="Picture 5" descr="tmpx1oigkcp.png"/>
+          <p:cNvPicPr>
+            <a:picLocks noChangeAspect="1"/>
+          </p:cNvPicPr>
+          <p:nvPr/>
+        </p:nvPicPr>
+        <p:blipFill>
+          <a:blip r:embed="rId2"/>
+          <a:stretch>
+            <a:fillRect/>
+          </a:stretch>
+        </p:blipFill>
+        <p:spPr>
+          <a:xfrm>
+            <a:off x="108000" y="756000"/>
+            <a:ext cx="11952000" cy="5580000"/>
+          </a:xfrm>
+          <a:prstGeom prst="rect">
+            <a:avLst/>
+          </a:prstGeom>
+        </p:spPr>
+      </p:pic>
+      <p:sp>
+        <p:nvSpPr>
+          <p:cNvPr id="7" name="Rectangle 6"/>
+          <p:cNvSpPr/>
+          <p:nvPr/>
+        </p:nvSpPr>
+        <p:spPr>
+          <a:xfrm>
+            <a:off x="0" y="6372000"/>
+            <a:ext cx="12189600" cy="486000"/>
+          </a:xfrm>
+          <a:prstGeom prst="rect">
+            <a:avLst/>
+          </a:prstGeom>
+          <a:solidFill>
+            <a:srgbClr val="20272B"/>
+          </a:solidFill>
+          <a:ln w="15240">
+            <a:solidFill>
+              <a:srgbClr val="FF8C42"/>
+            </a:solidFill>
+          </a:ln>
+        </p:spPr>
+        <p:style>
+          <a:lnRef idx="1">
+            <a:schemeClr val="accent1"/>
+          </a:lnRef>
+          <a:fillRef idx="3">
+            <a:schemeClr val="accent1"/>
+          </a:fillRef>
+          <a:effectRef idx="2">
+            <a:schemeClr val="accent1"/>
+          </a:effectRef>
+          <a:fontRef idx="minor">
+            <a:schemeClr val="lt1"/>
+          </a:fontRef>
+        </p:style>
+        <p:txBody>
+          <a:bodyPr rtlCol="0" anchor="ctr"/>
+          <a:lstStyle/>
+          <a:p>
+            <a:pPr algn="ctr"/>
+          </a:p>
+        </p:txBody>
+      </p:sp>
+      <p:sp>
+        <p:nvSpPr>
+          <p:cNvPr id="8" name="TextBox 7"/>
+          <p:cNvSpPr txBox="1"/>
+          <p:nvPr/>
+        </p:nvSpPr>
+        <p:spPr>
+          <a:xfrm>
+            <a:off x="180000" y="6390000"/>
+            <a:ext cx="11700000" cy="450000"/>
+          </a:xfrm>
+          <a:prstGeom prst="rect">
+            <a:avLst/>
+          </a:prstGeom>
+          <a:noFill/>
+        </p:spPr>
+        <p:txBody>
+          <a:bodyPr wrap="square">
+            <a:spAutoFit/>
+          </a:bodyPr>
+          <a:lstStyle/>
+          <a:p>
+            <a:pPr algn="l"/>
+            <a:r>
+              <a:rPr sz="1000" b="1" i="0">
+                <a:solidFill>
+                  <a:srgbClr val="FF8C42"/>
+                </a:solidFill>
+              </a:rPr>
+              <a:t>ВЫВОД: А-банк горячее В-банка на 17°C в среднем. Цил.11 достигает 546°C — ВНИМАНИЕ.</a:t>
+            </a:r>
+          </a:p>
+        </p:txBody>
+      </p:sp>
+    </p:spTree>
+  </p:cSld>
+  <p:clrMapOvr>
+    <a:masterClrMapping/>
+  </p:clrMapOvr>
+</p:sld>
+</file>
+
+<file path=ppt/slides/slide19.xml><?xml version="1.0" encoding="utf-8"?>
+<p:sld xmlns:a="http://schemas.openxmlformats.org/drawingml/2006/main" xmlns:p="http://schemas.openxmlformats.org/presentationml/2006/main" xmlns:r="http://schemas.openxmlformats.org/officeDocument/2006/relationships">
+  <p:cSld>
+    <p:bg>
+      <p:bgPr>
+        <a:solidFill>
+          <a:srgbClr val="293136"/>
+        </a:solidFill>
+        <a:effectLst/>
+      </p:bgPr>
+    </p:bg>
+    <p:spTree>
+      <p:nvGrpSpPr>
+        <p:cNvPr id="1" name=""/>
+        <p:cNvGrpSpPr/>
+        <p:nvPr/>
+      </p:nvGrpSpPr>
+      <p:grpSpPr/>
+      <p:sp>
+        <p:nvSpPr>
+          <p:cNvPr id="2" name="Rectangle 1"/>
+          <p:cNvSpPr/>
+          <p:nvPr/>
+        </p:nvSpPr>
+        <p:spPr>
+          <a:xfrm>
+            <a:off x="0" y="0"/>
+            <a:ext cx="12189600" cy="720000"/>
+          </a:xfrm>
+          <a:prstGeom prst="rect">
+            <a:avLst/>
+          </a:prstGeom>
+          <a:solidFill>
+            <a:srgbClr val="20272B"/>
+          </a:solidFill>
+          <a:ln>
+            <a:noFill/>
+          </a:ln>
+        </p:spPr>
+        <p:style>
+          <a:lnRef idx="1">
+            <a:schemeClr val="accent1"/>
+          </a:lnRef>
+          <a:fillRef idx="3">
+            <a:schemeClr val="accent1"/>
+          </a:fillRef>
+          <a:effectRef idx="2">
+            <a:schemeClr val="accent1"/>
+          </a:effectRef>
+          <a:fontRef idx="minor">
+            <a:schemeClr val="lt1"/>
+          </a:fontRef>
+        </p:style>
+        <p:txBody>
+          <a:bodyPr rtlCol="0" anchor="ctr"/>
+          <a:lstStyle/>
+          <a:p>
+            <a:pPr algn="ctr"/>
+          </a:p>
+        </p:txBody>
+      </p:sp>
+      <p:sp>
+        <p:nvSpPr>
+          <p:cNvPr id="3" name="Rectangle 2"/>
+          <p:cNvSpPr/>
+          <p:nvPr/>
+        </p:nvSpPr>
+        <p:spPr>
+          <a:xfrm>
+            <a:off x="0" y="666000"/>
+            <a:ext cx="12189600" cy="43200"/>
+          </a:xfrm>
+          <a:prstGeom prst="rect">
+            <a:avLst/>
+          </a:prstGeom>
+          <a:solidFill>
+            <a:srgbClr val="3EF0AF"/>
+          </a:solidFill>
+          <a:ln>
+            <a:noFill/>
+          </a:ln>
+        </p:spPr>
+        <p:style>
+          <a:lnRef idx="1">
+            <a:schemeClr val="accent1"/>
+          </a:lnRef>
+          <a:fillRef idx="3">
+            <a:schemeClr val="accent1"/>
+          </a:fillRef>
+          <a:effectRef idx="2">
+            <a:schemeClr val="accent1"/>
+          </a:effectRef>
+          <a:fontRef idx="minor">
+            <a:schemeClr val="lt1"/>
+          </a:fontRef>
+        </p:style>
+        <p:txBody>
+          <a:bodyPr rtlCol="0" anchor="ctr"/>
+          <a:lstStyle/>
+          <a:p>
+            <a:pPr algn="ctr"/>
+          </a:p>
+        </p:txBody>
+      </p:sp>
+      <p:sp>
+        <p:nvSpPr>
+          <p:cNvPr id="4" name="TextBox 3"/>
+          <p:cNvSpPr txBox="1"/>
+          <p:nvPr/>
+        </p:nvSpPr>
+        <p:spPr>
+          <a:xfrm>
+            <a:off x="180000" y="36000"/>
+            <a:ext cx="11520000" cy="396000"/>
+          </a:xfrm>
+          <a:prstGeom prst="rect">
+            <a:avLst/>
+          </a:prstGeom>
+          <a:noFill/>
+        </p:spPr>
+        <p:txBody>
+          <a:bodyPr wrap="square">
+            <a:spAutoFit/>
+          </a:bodyPr>
+          <a:lstStyle/>
+          <a:p>
+            <a:pPr algn="l"/>
+            <a:r>
+              <a:rPr sz="1600" b="1" i="0">
+                <a:solidFill>
+                  <a:srgbClr val="FFFFFF"/>
+                </a:solidFill>
+              </a:rPr>
+              <a:t>ТЕМПЕРАТУРА ЦИЛИНДРОВ — АГРЕГАТ #84 (16.05)  |  16.05.2026</a:t>
+            </a:r>
+          </a:p>
+        </p:txBody>
+      </p:sp>
+      <p:sp>
+        <p:nvSpPr>
+          <p:cNvPr id="5" name="TextBox 4"/>
+          <p:cNvSpPr txBox="1"/>
+          <p:nvPr/>
+        </p:nvSpPr>
+        <p:spPr>
+          <a:xfrm>
+            <a:off x="180000" y="432000"/>
+            <a:ext cx="11520000" cy="234000"/>
+          </a:xfrm>
+          <a:prstGeom prst="rect">
+            <a:avLst/>
+          </a:prstGeom>
+          <a:noFill/>
+        </p:spPr>
+        <p:txBody>
+          <a:bodyPr wrap="square">
+            <a:spAutoFit/>
+          </a:bodyPr>
+          <a:lstStyle/>
+          <a:p>
+            <a:pPr algn="l"/>
+            <a:r>
+              <a:rPr sz="950" b="0" i="0">
+                <a:solidFill>
+                  <a:srgbClr val="667788"/>
+                </a:solidFill>
+              </a:rPr>
+              <a:t>А-банк (нечётные, ECM144) — В-банк (чётные, ECM1)  |  Индивидуальные ЕГТ по цилиндрам</a:t>
+            </a:r>
+          </a:p>
+        </p:txBody>
+      </p:sp>
+      <p:pic>
+        <p:nvPicPr>
+          <p:cNvPr id="6" name="Picture 5" descr="tmpk5qx17f1.png"/>
+          <p:cNvPicPr>
+            <a:picLocks noChangeAspect="1"/>
+          </p:cNvPicPr>
+          <p:nvPr/>
+        </p:nvPicPr>
+        <p:blipFill>
+          <a:blip r:embed="rId2"/>
+          <a:stretch>
+            <a:fillRect/>
+          </a:stretch>
+        </p:blipFill>
+        <p:spPr>
+          <a:xfrm>
+            <a:off x="108000" y="756000"/>
+            <a:ext cx="11952000" cy="5580000"/>
+          </a:xfrm>
+          <a:prstGeom prst="rect">
+            <a:avLst/>
+          </a:prstGeom>
+        </p:spPr>
+      </p:pic>
+      <p:sp>
+        <p:nvSpPr>
+          <p:cNvPr id="7" name="Rectangle 6"/>
+          <p:cNvSpPr/>
+          <p:nvPr/>
+        </p:nvSpPr>
+        <p:spPr>
+          <a:xfrm>
+            <a:off x="0" y="6372000"/>
+            <a:ext cx="12189600" cy="486000"/>
+          </a:xfrm>
+          <a:prstGeom prst="rect">
+            <a:avLst/>
+          </a:prstGeom>
+          <a:solidFill>
+            <a:srgbClr val="20272B"/>
+          </a:solidFill>
+          <a:ln w="15240">
+            <a:solidFill>
+              <a:srgbClr val="FF8C42"/>
+            </a:solidFill>
+          </a:ln>
+        </p:spPr>
+        <p:style>
+          <a:lnRef idx="1">
+            <a:schemeClr val="accent1"/>
+          </a:lnRef>
+          <a:fillRef idx="3">
+            <a:schemeClr val="accent1"/>
+          </a:fillRef>
+          <a:effectRef idx="2">
+            <a:schemeClr val="accent1"/>
+          </a:effectRef>
+          <a:fontRef idx="minor">
+            <a:schemeClr val="lt1"/>
+          </a:fontRef>
+        </p:style>
+        <p:txBody>
+          <a:bodyPr rtlCol="0" anchor="ctr"/>
+          <a:lstStyle/>
+          <a:p>
+            <a:pPr algn="ctr"/>
+          </a:p>
+        </p:txBody>
+      </p:sp>
+      <p:sp>
+        <p:nvSpPr>
+          <p:cNvPr id="8" name="TextBox 7"/>
+          <p:cNvSpPr txBox="1"/>
+          <p:nvPr/>
+        </p:nvSpPr>
+        <p:spPr>
+          <a:xfrm>
+            <a:off x="180000" y="6390000"/>
+            <a:ext cx="11700000" cy="450000"/>
+          </a:xfrm>
+          <a:prstGeom prst="rect">
+            <a:avLst/>
+          </a:prstGeom>
+          <a:noFill/>
+        </p:spPr>
+        <p:txBody>
+          <a:bodyPr wrap="square">
+            <a:spAutoFit/>
+          </a:bodyPr>
+          <a:lstStyle/>
+          <a:p>
+            <a:pPr algn="l"/>
+            <a:r>
+              <a:rPr sz="1000" b="1" i="0">
+                <a:solidFill>
+                  <a:srgbClr val="FF8C42"/>
+                </a:solidFill>
+              </a:rPr>
+              <a:t>ВЫВОД: Банки температурно симметричны. Цил.6 достигает 528°C — ВНИМАНИЕ.</a:t>
+            </a:r>
+          </a:p>
+        </p:txBody>
+      </p:sp>
+    </p:spTree>
+  </p:cSld>
+  <p:clrMapOvr>
+    <a:masterClrMapping/>
+  </p:clrMapOvr>
+</p:sld>
+</file>
+
 <file path=ppt/slides/slide2.xml><?xml version="1.0" encoding="utf-8"?>
 <p:sld xmlns:a="http://schemas.openxmlformats.org/drawingml/2006/main" xmlns:p="http://schemas.openxmlformats.org/presentationml/2006/main" xmlns:r="http://schemas.openxmlformats.org/officeDocument/2006/relationships">
   <p:cSld>
@@ -13259,6 +15215,855 @@
                 <a:latin typeface="DejaVu Sans"/>
               </a:rPr>
               <a:t>102°C</a:t>
+            </a:r>
+          </a:p>
+        </p:txBody>
+      </p:sp>
+    </p:spTree>
+  </p:cSld>
+  <p:clrMapOvr>
+    <a:masterClrMapping/>
+  </p:clrMapOvr>
+</p:sld>
+</file>
+
+<file path=ppt/slides/slide20.xml><?xml version="1.0" encoding="utf-8"?>
+<p:sld xmlns:a="http://schemas.openxmlformats.org/drawingml/2006/main" xmlns:p="http://schemas.openxmlformats.org/presentationml/2006/main" xmlns:r="http://schemas.openxmlformats.org/officeDocument/2006/relationships">
+  <p:cSld>
+    <p:bg>
+      <p:bgPr>
+        <a:solidFill>
+          <a:srgbClr val="293136"/>
+        </a:solidFill>
+        <a:effectLst/>
+      </p:bgPr>
+    </p:bg>
+    <p:spTree>
+      <p:nvGrpSpPr>
+        <p:cNvPr id="1" name=""/>
+        <p:cNvGrpSpPr/>
+        <p:nvPr/>
+      </p:nvGrpSpPr>
+      <p:grpSpPr/>
+      <p:sp>
+        <p:nvSpPr>
+          <p:cNvPr id="2" name="Rectangle 1"/>
+          <p:cNvSpPr/>
+          <p:nvPr/>
+        </p:nvSpPr>
+        <p:spPr>
+          <a:xfrm>
+            <a:off x="0" y="0"/>
+            <a:ext cx="12189600" cy="720000"/>
+          </a:xfrm>
+          <a:prstGeom prst="rect">
+            <a:avLst/>
+          </a:prstGeom>
+          <a:solidFill>
+            <a:srgbClr val="20272B"/>
+          </a:solidFill>
+          <a:ln>
+            <a:noFill/>
+          </a:ln>
+        </p:spPr>
+        <p:style>
+          <a:lnRef idx="1">
+            <a:schemeClr val="accent1"/>
+          </a:lnRef>
+          <a:fillRef idx="3">
+            <a:schemeClr val="accent1"/>
+          </a:fillRef>
+          <a:effectRef idx="2">
+            <a:schemeClr val="accent1"/>
+          </a:effectRef>
+          <a:fontRef idx="minor">
+            <a:schemeClr val="lt1"/>
+          </a:fontRef>
+        </p:style>
+        <p:txBody>
+          <a:bodyPr rtlCol="0" anchor="ctr"/>
+          <a:lstStyle/>
+          <a:p>
+            <a:pPr algn="ctr"/>
+          </a:p>
+        </p:txBody>
+      </p:sp>
+      <p:sp>
+        <p:nvSpPr>
+          <p:cNvPr id="3" name="Rectangle 2"/>
+          <p:cNvSpPr/>
+          <p:nvPr/>
+        </p:nvSpPr>
+        <p:spPr>
+          <a:xfrm>
+            <a:off x="0" y="666000"/>
+            <a:ext cx="12189600" cy="43200"/>
+          </a:xfrm>
+          <a:prstGeom prst="rect">
+            <a:avLst/>
+          </a:prstGeom>
+          <a:solidFill>
+            <a:srgbClr val="3EF0AF"/>
+          </a:solidFill>
+          <a:ln>
+            <a:noFill/>
+          </a:ln>
+        </p:spPr>
+        <p:style>
+          <a:lnRef idx="1">
+            <a:schemeClr val="accent1"/>
+          </a:lnRef>
+          <a:fillRef idx="3">
+            <a:schemeClr val="accent1"/>
+          </a:fillRef>
+          <a:effectRef idx="2">
+            <a:schemeClr val="accent1"/>
+          </a:effectRef>
+          <a:fontRef idx="minor">
+            <a:schemeClr val="lt1"/>
+          </a:fontRef>
+        </p:style>
+        <p:txBody>
+          <a:bodyPr rtlCol="0" anchor="ctr"/>
+          <a:lstStyle/>
+          <a:p>
+            <a:pPr algn="ctr"/>
+          </a:p>
+        </p:txBody>
+      </p:sp>
+      <p:sp>
+        <p:nvSpPr>
+          <p:cNvPr id="4" name="TextBox 3"/>
+          <p:cNvSpPr txBox="1"/>
+          <p:nvPr/>
+        </p:nvSpPr>
+        <p:spPr>
+          <a:xfrm>
+            <a:off x="180000" y="36000"/>
+            <a:ext cx="11520000" cy="396000"/>
+          </a:xfrm>
+          <a:prstGeom prst="rect">
+            <a:avLst/>
+          </a:prstGeom>
+          <a:noFill/>
+        </p:spPr>
+        <p:txBody>
+          <a:bodyPr wrap="square">
+            <a:spAutoFit/>
+          </a:bodyPr>
+          <a:lstStyle/>
+          <a:p>
+            <a:pPr algn="l"/>
+            <a:r>
+              <a:rPr sz="1600" b="1" i="0">
+                <a:solidFill>
+                  <a:srgbClr val="FFFFFF"/>
+                </a:solidFill>
+              </a:rPr>
+              <a:t>ТЕМПЕРАТУРА ЦИЛИНДРОВ — АГРЕГАТ #84 (21.05)  |  21.05.2026</a:t>
+            </a:r>
+          </a:p>
+        </p:txBody>
+      </p:sp>
+      <p:sp>
+        <p:nvSpPr>
+          <p:cNvPr id="5" name="TextBox 4"/>
+          <p:cNvSpPr txBox="1"/>
+          <p:nvPr/>
+        </p:nvSpPr>
+        <p:spPr>
+          <a:xfrm>
+            <a:off x="180000" y="432000"/>
+            <a:ext cx="11520000" cy="234000"/>
+          </a:xfrm>
+          <a:prstGeom prst="rect">
+            <a:avLst/>
+          </a:prstGeom>
+          <a:noFill/>
+        </p:spPr>
+        <p:txBody>
+          <a:bodyPr wrap="square">
+            <a:spAutoFit/>
+          </a:bodyPr>
+          <a:lstStyle/>
+          <a:p>
+            <a:pPr algn="l"/>
+            <a:r>
+              <a:rPr sz="950" b="0" i="0">
+                <a:solidFill>
+                  <a:srgbClr val="667788"/>
+                </a:solidFill>
+              </a:rPr>
+              <a:t>А-банк (нечётные, ECM144) — В-банк (чётные, ECM1)  |  Индивидуальные ЕГТ по цилиндрам</a:t>
+            </a:r>
+          </a:p>
+        </p:txBody>
+      </p:sp>
+      <p:pic>
+        <p:nvPicPr>
+          <p:cNvPr id="6" name="Picture 5" descr="tmplfva8p4_.png"/>
+          <p:cNvPicPr>
+            <a:picLocks noChangeAspect="1"/>
+          </p:cNvPicPr>
+          <p:nvPr/>
+        </p:nvPicPr>
+        <p:blipFill>
+          <a:blip r:embed="rId2"/>
+          <a:stretch>
+            <a:fillRect/>
+          </a:stretch>
+        </p:blipFill>
+        <p:spPr>
+          <a:xfrm>
+            <a:off x="108000" y="756000"/>
+            <a:ext cx="11952000" cy="5580000"/>
+          </a:xfrm>
+          <a:prstGeom prst="rect">
+            <a:avLst/>
+          </a:prstGeom>
+        </p:spPr>
+      </p:pic>
+      <p:sp>
+        <p:nvSpPr>
+          <p:cNvPr id="7" name="Rectangle 6"/>
+          <p:cNvSpPr/>
+          <p:nvPr/>
+        </p:nvSpPr>
+        <p:spPr>
+          <a:xfrm>
+            <a:off x="0" y="6372000"/>
+            <a:ext cx="12189600" cy="486000"/>
+          </a:xfrm>
+          <a:prstGeom prst="rect">
+            <a:avLst/>
+          </a:prstGeom>
+          <a:solidFill>
+            <a:srgbClr val="20272B"/>
+          </a:solidFill>
+          <a:ln w="15240">
+            <a:solidFill>
+              <a:srgbClr val="FF8C42"/>
+            </a:solidFill>
+          </a:ln>
+        </p:spPr>
+        <p:style>
+          <a:lnRef idx="1">
+            <a:schemeClr val="accent1"/>
+          </a:lnRef>
+          <a:fillRef idx="3">
+            <a:schemeClr val="accent1"/>
+          </a:fillRef>
+          <a:effectRef idx="2">
+            <a:schemeClr val="accent1"/>
+          </a:effectRef>
+          <a:fontRef idx="minor">
+            <a:schemeClr val="lt1"/>
+          </a:fontRef>
+        </p:style>
+        <p:txBody>
+          <a:bodyPr rtlCol="0" anchor="ctr"/>
+          <a:lstStyle/>
+          <a:p>
+            <a:pPr algn="ctr"/>
+          </a:p>
+        </p:txBody>
+      </p:sp>
+      <p:sp>
+        <p:nvSpPr>
+          <p:cNvPr id="8" name="TextBox 7"/>
+          <p:cNvSpPr txBox="1"/>
+          <p:nvPr/>
+        </p:nvSpPr>
+        <p:spPr>
+          <a:xfrm>
+            <a:off x="180000" y="6390000"/>
+            <a:ext cx="11700000" cy="450000"/>
+          </a:xfrm>
+          <a:prstGeom prst="rect">
+            <a:avLst/>
+          </a:prstGeom>
+          <a:noFill/>
+        </p:spPr>
+        <p:txBody>
+          <a:bodyPr wrap="square">
+            <a:spAutoFit/>
+          </a:bodyPr>
+          <a:lstStyle/>
+          <a:p>
+            <a:pPr algn="l"/>
+            <a:r>
+              <a:rPr sz="1000" b="1" i="0">
+                <a:solidFill>
+                  <a:srgbClr val="FF8C42"/>
+                </a:solidFill>
+              </a:rPr>
+              <a:t>ВЫВОД: Банки температурно симметричны. Цил.6 достигает 538°C — ВНИМАНИЕ.</a:t>
+            </a:r>
+          </a:p>
+        </p:txBody>
+      </p:sp>
+    </p:spTree>
+  </p:cSld>
+  <p:clrMapOvr>
+    <a:masterClrMapping/>
+  </p:clrMapOvr>
+</p:sld>
+</file>
+
+<file path=ppt/slides/slide21.xml><?xml version="1.0" encoding="utf-8"?>
+<p:sld xmlns:a="http://schemas.openxmlformats.org/drawingml/2006/main" xmlns:p="http://schemas.openxmlformats.org/presentationml/2006/main" xmlns:r="http://schemas.openxmlformats.org/officeDocument/2006/relationships">
+  <p:cSld>
+    <p:bg>
+      <p:bgPr>
+        <a:solidFill>
+          <a:srgbClr val="293136"/>
+        </a:solidFill>
+        <a:effectLst/>
+      </p:bgPr>
+    </p:bg>
+    <p:spTree>
+      <p:nvGrpSpPr>
+        <p:cNvPr id="1" name=""/>
+        <p:cNvGrpSpPr/>
+        <p:nvPr/>
+      </p:nvGrpSpPr>
+      <p:grpSpPr/>
+      <p:sp>
+        <p:nvSpPr>
+          <p:cNvPr id="2" name="Rectangle 1"/>
+          <p:cNvSpPr/>
+          <p:nvPr/>
+        </p:nvSpPr>
+        <p:spPr>
+          <a:xfrm>
+            <a:off x="0" y="0"/>
+            <a:ext cx="12189600" cy="720000"/>
+          </a:xfrm>
+          <a:prstGeom prst="rect">
+            <a:avLst/>
+          </a:prstGeom>
+          <a:solidFill>
+            <a:srgbClr val="20272B"/>
+          </a:solidFill>
+          <a:ln>
+            <a:noFill/>
+          </a:ln>
+        </p:spPr>
+        <p:style>
+          <a:lnRef idx="1">
+            <a:schemeClr val="accent1"/>
+          </a:lnRef>
+          <a:fillRef idx="3">
+            <a:schemeClr val="accent1"/>
+          </a:fillRef>
+          <a:effectRef idx="2">
+            <a:schemeClr val="accent1"/>
+          </a:effectRef>
+          <a:fontRef idx="minor">
+            <a:schemeClr val="lt1"/>
+          </a:fontRef>
+        </p:style>
+        <p:txBody>
+          <a:bodyPr rtlCol="0" anchor="ctr"/>
+          <a:lstStyle/>
+          <a:p>
+            <a:pPr algn="ctr"/>
+          </a:p>
+        </p:txBody>
+      </p:sp>
+      <p:sp>
+        <p:nvSpPr>
+          <p:cNvPr id="3" name="Rectangle 2"/>
+          <p:cNvSpPr/>
+          <p:nvPr/>
+        </p:nvSpPr>
+        <p:spPr>
+          <a:xfrm>
+            <a:off x="0" y="666000"/>
+            <a:ext cx="12189600" cy="43200"/>
+          </a:xfrm>
+          <a:prstGeom prst="rect">
+            <a:avLst/>
+          </a:prstGeom>
+          <a:solidFill>
+            <a:srgbClr val="3EF0AF"/>
+          </a:solidFill>
+          <a:ln>
+            <a:noFill/>
+          </a:ln>
+        </p:spPr>
+        <p:style>
+          <a:lnRef idx="1">
+            <a:schemeClr val="accent1"/>
+          </a:lnRef>
+          <a:fillRef idx="3">
+            <a:schemeClr val="accent1"/>
+          </a:fillRef>
+          <a:effectRef idx="2">
+            <a:schemeClr val="accent1"/>
+          </a:effectRef>
+          <a:fontRef idx="minor">
+            <a:schemeClr val="lt1"/>
+          </a:fontRef>
+        </p:style>
+        <p:txBody>
+          <a:bodyPr rtlCol="0" anchor="ctr"/>
+          <a:lstStyle/>
+          <a:p>
+            <a:pPr algn="ctr"/>
+          </a:p>
+        </p:txBody>
+      </p:sp>
+      <p:sp>
+        <p:nvSpPr>
+          <p:cNvPr id="4" name="TextBox 3"/>
+          <p:cNvSpPr txBox="1"/>
+          <p:nvPr/>
+        </p:nvSpPr>
+        <p:spPr>
+          <a:xfrm>
+            <a:off x="180000" y="36000"/>
+            <a:ext cx="11520000" cy="396000"/>
+          </a:xfrm>
+          <a:prstGeom prst="rect">
+            <a:avLst/>
+          </a:prstGeom>
+          <a:noFill/>
+        </p:spPr>
+        <p:txBody>
+          <a:bodyPr wrap="square">
+            <a:spAutoFit/>
+          </a:bodyPr>
+          <a:lstStyle/>
+          <a:p>
+            <a:pPr algn="l"/>
+            <a:r>
+              <a:rPr sz="1600" b="1" i="0">
+                <a:solidFill>
+                  <a:srgbClr val="FFFFFF"/>
+                </a:solidFill>
+              </a:rPr>
+              <a:t>ТЕМПЕРАТУРА ЦИЛИНДРОВ — АГРЕГАТ #85  |  19.05.2026</a:t>
+            </a:r>
+          </a:p>
+        </p:txBody>
+      </p:sp>
+      <p:sp>
+        <p:nvSpPr>
+          <p:cNvPr id="5" name="TextBox 4"/>
+          <p:cNvSpPr txBox="1"/>
+          <p:nvPr/>
+        </p:nvSpPr>
+        <p:spPr>
+          <a:xfrm>
+            <a:off x="180000" y="432000"/>
+            <a:ext cx="11520000" cy="234000"/>
+          </a:xfrm>
+          <a:prstGeom prst="rect">
+            <a:avLst/>
+          </a:prstGeom>
+          <a:noFill/>
+        </p:spPr>
+        <p:txBody>
+          <a:bodyPr wrap="square">
+            <a:spAutoFit/>
+          </a:bodyPr>
+          <a:lstStyle/>
+          <a:p>
+            <a:pPr algn="l"/>
+            <a:r>
+              <a:rPr sz="950" b="0" i="0">
+                <a:solidFill>
+                  <a:srgbClr val="667788"/>
+                </a:solidFill>
+              </a:rPr>
+              <a:t>А-банк (нечётные, ECM144) — В-банк (чётные, ECM1)  |  Индивидуальные ЕГТ по цилиндрам</a:t>
+            </a:r>
+          </a:p>
+        </p:txBody>
+      </p:sp>
+      <p:pic>
+        <p:nvPicPr>
+          <p:cNvPr id="6" name="Picture 5" descr="tmpokyh4mcv.png"/>
+          <p:cNvPicPr>
+            <a:picLocks noChangeAspect="1"/>
+          </p:cNvPicPr>
+          <p:nvPr/>
+        </p:nvPicPr>
+        <p:blipFill>
+          <a:blip r:embed="rId2"/>
+          <a:stretch>
+            <a:fillRect/>
+          </a:stretch>
+        </p:blipFill>
+        <p:spPr>
+          <a:xfrm>
+            <a:off x="108000" y="756000"/>
+            <a:ext cx="11952000" cy="5580000"/>
+          </a:xfrm>
+          <a:prstGeom prst="rect">
+            <a:avLst/>
+          </a:prstGeom>
+        </p:spPr>
+      </p:pic>
+      <p:sp>
+        <p:nvSpPr>
+          <p:cNvPr id="7" name="Rectangle 6"/>
+          <p:cNvSpPr/>
+          <p:nvPr/>
+        </p:nvSpPr>
+        <p:spPr>
+          <a:xfrm>
+            <a:off x="0" y="6372000"/>
+            <a:ext cx="12189600" cy="486000"/>
+          </a:xfrm>
+          <a:prstGeom prst="rect">
+            <a:avLst/>
+          </a:prstGeom>
+          <a:solidFill>
+            <a:srgbClr val="20272B"/>
+          </a:solidFill>
+          <a:ln w="15240">
+            <a:solidFill>
+              <a:srgbClr val="FF8C42"/>
+            </a:solidFill>
+          </a:ln>
+        </p:spPr>
+        <p:style>
+          <a:lnRef idx="1">
+            <a:schemeClr val="accent1"/>
+          </a:lnRef>
+          <a:fillRef idx="3">
+            <a:schemeClr val="accent1"/>
+          </a:fillRef>
+          <a:effectRef idx="2">
+            <a:schemeClr val="accent1"/>
+          </a:effectRef>
+          <a:fontRef idx="minor">
+            <a:schemeClr val="lt1"/>
+          </a:fontRef>
+        </p:style>
+        <p:txBody>
+          <a:bodyPr rtlCol="0" anchor="ctr"/>
+          <a:lstStyle/>
+          <a:p>
+            <a:pPr algn="ctr"/>
+          </a:p>
+        </p:txBody>
+      </p:sp>
+      <p:sp>
+        <p:nvSpPr>
+          <p:cNvPr id="8" name="TextBox 7"/>
+          <p:cNvSpPr txBox="1"/>
+          <p:nvPr/>
+        </p:nvSpPr>
+        <p:spPr>
+          <a:xfrm>
+            <a:off x="180000" y="6390000"/>
+            <a:ext cx="11700000" cy="450000"/>
+          </a:xfrm>
+          <a:prstGeom prst="rect">
+            <a:avLst/>
+          </a:prstGeom>
+          <a:noFill/>
+        </p:spPr>
+        <p:txBody>
+          <a:bodyPr wrap="square">
+            <a:spAutoFit/>
+          </a:bodyPr>
+          <a:lstStyle/>
+          <a:p>
+            <a:pPr algn="l"/>
+            <a:r>
+              <a:rPr sz="1000" b="1" i="0">
+                <a:solidFill>
+                  <a:srgbClr val="FF8C42"/>
+                </a:solidFill>
+              </a:rPr>
+              <a:t>ВЫВОД: Банки температурно симметричны. Цил.6 достигает 606°C — КРИТИЧНО.</a:t>
+            </a:r>
+          </a:p>
+        </p:txBody>
+      </p:sp>
+    </p:spTree>
+  </p:cSld>
+  <p:clrMapOvr>
+    <a:masterClrMapping/>
+  </p:clrMapOvr>
+</p:sld>
+</file>
+
+<file path=ppt/slides/slide22.xml><?xml version="1.0" encoding="utf-8"?>
+<p:sld xmlns:a="http://schemas.openxmlformats.org/drawingml/2006/main" xmlns:p="http://schemas.openxmlformats.org/presentationml/2006/main" xmlns:r="http://schemas.openxmlformats.org/officeDocument/2006/relationships">
+  <p:cSld>
+    <p:bg>
+      <p:bgPr>
+        <a:solidFill>
+          <a:srgbClr val="293136"/>
+        </a:solidFill>
+        <a:effectLst/>
+      </p:bgPr>
+    </p:bg>
+    <p:spTree>
+      <p:nvGrpSpPr>
+        <p:cNvPr id="1" name=""/>
+        <p:cNvGrpSpPr/>
+        <p:nvPr/>
+      </p:nvGrpSpPr>
+      <p:grpSpPr/>
+      <p:sp>
+        <p:nvSpPr>
+          <p:cNvPr id="2" name="Rectangle 1"/>
+          <p:cNvSpPr/>
+          <p:nvPr/>
+        </p:nvSpPr>
+        <p:spPr>
+          <a:xfrm>
+            <a:off x="0" y="0"/>
+            <a:ext cx="12189600" cy="720000"/>
+          </a:xfrm>
+          <a:prstGeom prst="rect">
+            <a:avLst/>
+          </a:prstGeom>
+          <a:solidFill>
+            <a:srgbClr val="20272B"/>
+          </a:solidFill>
+          <a:ln>
+            <a:noFill/>
+          </a:ln>
+        </p:spPr>
+        <p:style>
+          <a:lnRef idx="1">
+            <a:schemeClr val="accent1"/>
+          </a:lnRef>
+          <a:fillRef idx="3">
+            <a:schemeClr val="accent1"/>
+          </a:fillRef>
+          <a:effectRef idx="2">
+            <a:schemeClr val="accent1"/>
+          </a:effectRef>
+          <a:fontRef idx="minor">
+            <a:schemeClr val="lt1"/>
+          </a:fontRef>
+        </p:style>
+        <p:txBody>
+          <a:bodyPr rtlCol="0" anchor="ctr"/>
+          <a:lstStyle/>
+          <a:p>
+            <a:pPr algn="ctr"/>
+          </a:p>
+        </p:txBody>
+      </p:sp>
+      <p:sp>
+        <p:nvSpPr>
+          <p:cNvPr id="3" name="Rectangle 2"/>
+          <p:cNvSpPr/>
+          <p:nvPr/>
+        </p:nvSpPr>
+        <p:spPr>
+          <a:xfrm>
+            <a:off x="0" y="666000"/>
+            <a:ext cx="12189600" cy="43200"/>
+          </a:xfrm>
+          <a:prstGeom prst="rect">
+            <a:avLst/>
+          </a:prstGeom>
+          <a:solidFill>
+            <a:srgbClr val="3EF0AF"/>
+          </a:solidFill>
+          <a:ln>
+            <a:noFill/>
+          </a:ln>
+        </p:spPr>
+        <p:style>
+          <a:lnRef idx="1">
+            <a:schemeClr val="accent1"/>
+          </a:lnRef>
+          <a:fillRef idx="3">
+            <a:schemeClr val="accent1"/>
+          </a:fillRef>
+          <a:effectRef idx="2">
+            <a:schemeClr val="accent1"/>
+          </a:effectRef>
+          <a:fontRef idx="minor">
+            <a:schemeClr val="lt1"/>
+          </a:fontRef>
+        </p:style>
+        <p:txBody>
+          <a:bodyPr rtlCol="0" anchor="ctr"/>
+          <a:lstStyle/>
+          <a:p>
+            <a:pPr algn="ctr"/>
+          </a:p>
+        </p:txBody>
+      </p:sp>
+      <p:sp>
+        <p:nvSpPr>
+          <p:cNvPr id="4" name="TextBox 3"/>
+          <p:cNvSpPr txBox="1"/>
+          <p:nvPr/>
+        </p:nvSpPr>
+        <p:spPr>
+          <a:xfrm>
+            <a:off x="180000" y="36000"/>
+            <a:ext cx="11520000" cy="396000"/>
+          </a:xfrm>
+          <a:prstGeom prst="rect">
+            <a:avLst/>
+          </a:prstGeom>
+          <a:noFill/>
+        </p:spPr>
+        <p:txBody>
+          <a:bodyPr wrap="square">
+            <a:spAutoFit/>
+          </a:bodyPr>
+          <a:lstStyle/>
+          <a:p>
+            <a:pPr algn="l"/>
+            <a:r>
+              <a:rPr sz="1600" b="1" i="0">
+                <a:solidFill>
+                  <a:srgbClr val="FFFFFF"/>
+                </a:solidFill>
+              </a:rPr>
+              <a:t>ТЕМПЕРАТУРА ЦИЛИНДРОВ — АГРЕГАТ #87  |  21.05.2026</a:t>
+            </a:r>
+          </a:p>
+        </p:txBody>
+      </p:sp>
+      <p:sp>
+        <p:nvSpPr>
+          <p:cNvPr id="5" name="TextBox 4"/>
+          <p:cNvSpPr txBox="1"/>
+          <p:nvPr/>
+        </p:nvSpPr>
+        <p:spPr>
+          <a:xfrm>
+            <a:off x="180000" y="432000"/>
+            <a:ext cx="11520000" cy="234000"/>
+          </a:xfrm>
+          <a:prstGeom prst="rect">
+            <a:avLst/>
+          </a:prstGeom>
+          <a:noFill/>
+        </p:spPr>
+        <p:txBody>
+          <a:bodyPr wrap="square">
+            <a:spAutoFit/>
+          </a:bodyPr>
+          <a:lstStyle/>
+          <a:p>
+            <a:pPr algn="l"/>
+            <a:r>
+              <a:rPr sz="950" b="0" i="0">
+                <a:solidFill>
+                  <a:srgbClr val="667788"/>
+                </a:solidFill>
+              </a:rPr>
+              <a:t>А-банк (нечётные, ECM144) — В-банк (чётные, ECM1)  |  Индивидуальные ЕГТ по цилиндрам</a:t>
+            </a:r>
+          </a:p>
+        </p:txBody>
+      </p:sp>
+      <p:pic>
+        <p:nvPicPr>
+          <p:cNvPr id="6" name="Picture 5" descr="tmpzs_bprnl.png"/>
+          <p:cNvPicPr>
+            <a:picLocks noChangeAspect="1"/>
+          </p:cNvPicPr>
+          <p:nvPr/>
+        </p:nvPicPr>
+        <p:blipFill>
+          <a:blip r:embed="rId2"/>
+          <a:stretch>
+            <a:fillRect/>
+          </a:stretch>
+        </p:blipFill>
+        <p:spPr>
+          <a:xfrm>
+            <a:off x="108000" y="756000"/>
+            <a:ext cx="11952000" cy="5580000"/>
+          </a:xfrm>
+          <a:prstGeom prst="rect">
+            <a:avLst/>
+          </a:prstGeom>
+        </p:spPr>
+      </p:pic>
+      <p:sp>
+        <p:nvSpPr>
+          <p:cNvPr id="7" name="Rectangle 6"/>
+          <p:cNvSpPr/>
+          <p:nvPr/>
+        </p:nvSpPr>
+        <p:spPr>
+          <a:xfrm>
+            <a:off x="0" y="6372000"/>
+            <a:ext cx="12189600" cy="486000"/>
+          </a:xfrm>
+          <a:prstGeom prst="rect">
+            <a:avLst/>
+          </a:prstGeom>
+          <a:solidFill>
+            <a:srgbClr val="20272B"/>
+          </a:solidFill>
+          <a:ln w="15240">
+            <a:solidFill>
+              <a:srgbClr val="FF8C42"/>
+            </a:solidFill>
+          </a:ln>
+        </p:spPr>
+        <p:style>
+          <a:lnRef idx="1">
+            <a:schemeClr val="accent1"/>
+          </a:lnRef>
+          <a:fillRef idx="3">
+            <a:schemeClr val="accent1"/>
+          </a:fillRef>
+          <a:effectRef idx="2">
+            <a:schemeClr val="accent1"/>
+          </a:effectRef>
+          <a:fontRef idx="minor">
+            <a:schemeClr val="lt1"/>
+          </a:fontRef>
+        </p:style>
+        <p:txBody>
+          <a:bodyPr rtlCol="0" anchor="ctr"/>
+          <a:lstStyle/>
+          <a:p>
+            <a:pPr algn="ctr"/>
+          </a:p>
+        </p:txBody>
+      </p:sp>
+      <p:sp>
+        <p:nvSpPr>
+          <p:cNvPr id="8" name="TextBox 7"/>
+          <p:cNvSpPr txBox="1"/>
+          <p:nvPr/>
+        </p:nvSpPr>
+        <p:spPr>
+          <a:xfrm>
+            <a:off x="180000" y="6390000"/>
+            <a:ext cx="11700000" cy="450000"/>
+          </a:xfrm>
+          <a:prstGeom prst="rect">
+            <a:avLst/>
+          </a:prstGeom>
+          <a:noFill/>
+        </p:spPr>
+        <p:txBody>
+          <a:bodyPr wrap="square">
+            <a:spAutoFit/>
+          </a:bodyPr>
+          <a:lstStyle/>
+          <a:p>
+            <a:pPr algn="l"/>
+            <a:r>
+              <a:rPr sz="1000" b="1" i="0">
+                <a:solidFill>
+                  <a:srgbClr val="FF8C42"/>
+                </a:solidFill>
+              </a:rPr>
+              <a:t>ВЫВОД: А-банк горячее В-банка на 17°C в среднем. Цил.1 достигает 550°C — КРИТИЧНО.</a:t>
             </a:r>
           </a:p>
         </p:txBody>

--- a/DML_Анализ_LogFiles_NTE200.pptx
+++ b/DML_Анализ_LogFiles_NTE200.pptx
@@ -4334,7 +4334,7 @@
       </p:sp>
       <p:pic>
         <p:nvPicPr>
-          <p:cNvPr id="8" name="Picture 7" descr="tmpx63_sxod.png"/>
+          <p:cNvPr id="8" name="Picture 7" descr="tmpl2hen8yc.png"/>
           <p:cNvPicPr>
             <a:picLocks noChangeAspect="1"/>
           </p:cNvPicPr>
@@ -4618,7 +4618,7 @@
       </p:sp>
       <p:pic>
         <p:nvPicPr>
-          <p:cNvPr id="8" name="Picture 7" descr="tmpfbm52wsp.png"/>
+          <p:cNvPr id="8" name="Picture 7" descr="tmpy1qsdr8c.png"/>
           <p:cNvPicPr>
             <a:picLocks noChangeAspect="1"/>
           </p:cNvPicPr>
@@ -7544,108 +7544,6 @@
         </p:nvSpPr>
         <p:spPr>
           <a:xfrm>
-            <a:off x="2520000" y="2628000"/>
-            <a:ext cx="9000000" cy="900000"/>
-          </a:xfrm>
-          <a:prstGeom prst="rect">
-            <a:avLst/>
-          </a:prstGeom>
-          <a:noFill/>
-        </p:spPr>
-        <p:txBody>
-          <a:bodyPr wrap="square">
-            <a:spAutoFit/>
-          </a:bodyPr>
-          <a:lstStyle/>
-          <a:p>
-            <a:pPr algn="l"/>
-            <a:r>
-              <a:rPr sz="4400" b="1" i="0">
-                <a:solidFill>
-                  <a:srgbClr val="FFFFFF"/>
-                </a:solidFill>
-              </a:rPr>
-              <a:t>ТЕМПЕРАТУРА</a:t>
-            </a:r>
-          </a:p>
-        </p:txBody>
-      </p:sp>
-      <p:sp>
-        <p:nvSpPr>
-          <p:cNvPr id="5" name="TextBox 4"/>
-          <p:cNvSpPr txBox="1"/>
-          <p:nvPr/>
-        </p:nvSpPr>
-        <p:spPr>
-          <a:xfrm>
-            <a:off x="2520000" y="3456000"/>
-            <a:ext cx="9000000" cy="720000"/>
-          </a:xfrm>
-          <a:prstGeom prst="rect">
-            <a:avLst/>
-          </a:prstGeom>
-          <a:noFill/>
-        </p:spPr>
-        <p:txBody>
-          <a:bodyPr wrap="square">
-            <a:spAutoFit/>
-          </a:bodyPr>
-          <a:lstStyle/>
-          <a:p>
-            <a:pPr algn="l"/>
-            <a:r>
-              <a:rPr sz="4400" b="1" i="0">
-                <a:solidFill>
-                  <a:srgbClr val="3EF0AF"/>
-                </a:solidFill>
-              </a:rPr>
-              <a:t>ПО ЦИЛИНДРАМ</a:t>
-            </a:r>
-          </a:p>
-        </p:txBody>
-      </p:sp>
-      <p:sp>
-        <p:nvSpPr>
-          <p:cNvPr id="6" name="TextBox 5"/>
-          <p:cNvSpPr txBox="1"/>
-          <p:nvPr/>
-        </p:nvSpPr>
-        <p:spPr>
-          <a:xfrm>
-            <a:off x="2520000" y="4320000"/>
-            <a:ext cx="9000000" cy="360000"/>
-          </a:xfrm>
-          <a:prstGeom prst="rect">
-            <a:avLst/>
-          </a:prstGeom>
-          <a:noFill/>
-        </p:spPr>
-        <p:txBody>
-          <a:bodyPr wrap="square">
-            <a:spAutoFit/>
-          </a:bodyPr>
-          <a:lstStyle/>
-          <a:p>
-            <a:pPr algn="l"/>
-            <a:r>
-              <a:rPr sz="1300" b="0" i="0">
-                <a:solidFill>
-                  <a:srgbClr val="667788"/>
-                </a:solidFill>
-              </a:rPr>
-              <a:t>А-банк (ECM144) vs В-банк (ECM1)  |  Все 9 агрегатов  |  16–21 мая 2026</a:t>
-            </a:r>
-          </a:p>
-        </p:txBody>
-      </p:sp>
-      <p:sp>
-        <p:nvSpPr>
-          <p:cNvPr id="7" name="TextBox 6"/>
-          <p:cNvSpPr txBox="1"/>
-          <p:nvPr/>
-        </p:nvSpPr>
-        <p:spPr>
-          <a:xfrm>
             <a:off x="540000" y="2700000"/>
             <a:ext cx="1800000" cy="1080000"/>
           </a:xfrm>
@@ -7668,6 +7566,108 @@
                 </a:solidFill>
               </a:rPr>
               <a:t>09</a:t>
+            </a:r>
+          </a:p>
+        </p:txBody>
+      </p:sp>
+      <p:sp>
+        <p:nvSpPr>
+          <p:cNvPr id="5" name="TextBox 4"/>
+          <p:cNvSpPr txBox="1"/>
+          <p:nvPr/>
+        </p:nvSpPr>
+        <p:spPr>
+          <a:xfrm>
+            <a:off x="2520000" y="2700000"/>
+            <a:ext cx="9000000" cy="900000"/>
+          </a:xfrm>
+          <a:prstGeom prst="rect">
+            <a:avLst/>
+          </a:prstGeom>
+          <a:noFill/>
+        </p:spPr>
+        <p:txBody>
+          <a:bodyPr wrap="square">
+            <a:spAutoFit/>
+          </a:bodyPr>
+          <a:lstStyle/>
+          <a:p>
+            <a:pPr algn="l"/>
+            <a:r>
+              <a:rPr sz="4400" b="1" i="0">
+                <a:solidFill>
+                  <a:srgbClr val="FFFFFF"/>
+                </a:solidFill>
+              </a:rPr>
+              <a:t>ТЕМПЕРАТУРА</a:t>
+            </a:r>
+          </a:p>
+        </p:txBody>
+      </p:sp>
+      <p:sp>
+        <p:nvSpPr>
+          <p:cNvPr id="6" name="TextBox 5"/>
+          <p:cNvSpPr txBox="1"/>
+          <p:nvPr/>
+        </p:nvSpPr>
+        <p:spPr>
+          <a:xfrm>
+            <a:off x="2520000" y="3491999"/>
+            <a:ext cx="9000000" cy="720000"/>
+          </a:xfrm>
+          <a:prstGeom prst="rect">
+            <a:avLst/>
+          </a:prstGeom>
+          <a:noFill/>
+        </p:spPr>
+        <p:txBody>
+          <a:bodyPr wrap="square">
+            <a:spAutoFit/>
+          </a:bodyPr>
+          <a:lstStyle/>
+          <a:p>
+            <a:pPr algn="l"/>
+            <a:r>
+              <a:rPr sz="4400" b="1" i="0">
+                <a:solidFill>
+                  <a:srgbClr val="3EF0AF"/>
+                </a:solidFill>
+              </a:rPr>
+              <a:t>ПО ЦИЛИНДРАМ</a:t>
+            </a:r>
+          </a:p>
+        </p:txBody>
+      </p:sp>
+      <p:sp>
+        <p:nvSpPr>
+          <p:cNvPr id="7" name="TextBox 6"/>
+          <p:cNvSpPr txBox="1"/>
+          <p:nvPr/>
+        </p:nvSpPr>
+        <p:spPr>
+          <a:xfrm>
+            <a:off x="2520000" y="4392000"/>
+            <a:ext cx="9000000" cy="360000"/>
+          </a:xfrm>
+          <a:prstGeom prst="rect">
+            <a:avLst/>
+          </a:prstGeom>
+          <a:noFill/>
+        </p:spPr>
+        <p:txBody>
+          <a:bodyPr wrap="square">
+            <a:spAutoFit/>
+          </a:bodyPr>
+          <a:lstStyle/>
+          <a:p>
+            <a:pPr algn="l"/>
+            <a:r>
+              <a:rPr sz="1200" b="0" i="0">
+                <a:solidFill>
+                  <a:srgbClr val="667788"/>
+                </a:solidFill>
+              </a:rPr>
+              <a:t>А-банк (ECM144) vs В-банк (ECM1)  |  Δ цилиндров  |  9 агрегатов  |  май 2026</a:t>
             </a:r>
           </a:p>
         </p:txBody>
@@ -7793,7 +7793,7 @@
         <p:spPr>
           <a:xfrm>
             <a:off x="180000" y="36000"/>
-            <a:ext cx="11520000" cy="396000"/>
+            <a:ext cx="11520000" cy="360000"/>
           </a:xfrm>
           <a:prstGeom prst="rect">
             <a:avLst/>
@@ -7808,12 +7808,12 @@
           <a:p>
             <a:pPr algn="l"/>
             <a:r>
-              <a:rPr sz="1600" b="1" i="0">
+              <a:rPr sz="1500" b="1" i="0">
                 <a:solidFill>
                   <a:srgbClr val="FFFFFF"/>
                 </a:solidFill>
               </a:rPr>
-              <a:t>ТЕМПЕРАТУРА ЦИЛИНДРОВ — АГРЕГАТ #43 (клапан)  |  16.05.2026</a:t>
+              <a:t>ТЕМПЕРАТУРА ЦИЛИНДРОВ — NTE200 #43 (клапан)  |  16.05.2026</a:t>
             </a:r>
           </a:p>
         </p:txBody>
@@ -7826,8 +7826,8 @@
         </p:nvSpPr>
         <p:spPr>
           <a:xfrm>
-            <a:off x="180000" y="432000"/>
-            <a:ext cx="11520000" cy="234000"/>
+            <a:off x="180000" y="413999"/>
+            <a:ext cx="11520000" cy="251999"/>
           </a:xfrm>
           <a:prstGeom prst="rect">
             <a:avLst/>
@@ -7842,19 +7842,19 @@
           <a:p>
             <a:pPr algn="l"/>
             <a:r>
-              <a:rPr sz="950" b="0" i="0">
+              <a:rPr sz="900" b="0" i="0">
                 <a:solidFill>
                   <a:srgbClr val="667788"/>
                 </a:solidFill>
               </a:rPr>
-              <a:t>А-банк (нечётные, ECM144) — В-банк (чётные, ECM1)  |  Индивидуальные ЕГТ по цилиндрам</a:t>
+              <a:t>Δ внутри банков  |  Δ каждого цилиндра от среднего  |  Межбанковая асимметрия по времени</a:t>
             </a:r>
           </a:p>
         </p:txBody>
       </p:sp>
       <p:pic>
         <p:nvPicPr>
-          <p:cNvPr id="6" name="Picture 5" descr="tmp23s4fo2y.png"/>
+          <p:cNvPr id="6" name="Picture 5" descr="tmpz0xmnck_.png"/>
           <p:cNvPicPr>
             <a:picLocks noChangeAspect="1"/>
           </p:cNvPicPr>
@@ -7868,8 +7868,8 @@
         </p:blipFill>
         <p:spPr>
           <a:xfrm>
-            <a:off x="108000" y="756000"/>
-            <a:ext cx="11952000" cy="5580000"/>
+            <a:off x="72000" y="737999"/>
+            <a:ext cx="12045600" cy="5598000"/>
           </a:xfrm>
           <a:prstGeom prst="rect">
             <a:avLst/>
@@ -7884,8 +7884,8 @@
         </p:nvSpPr>
         <p:spPr>
           <a:xfrm>
-            <a:off x="0" y="6372000"/>
-            <a:ext cx="12189600" cy="486000"/>
+            <a:off x="0" y="6364800"/>
+            <a:ext cx="12189600" cy="493200"/>
           </a:xfrm>
           <a:prstGeom prst="rect">
             <a:avLst/>
@@ -7929,8 +7929,8 @@
         </p:nvSpPr>
         <p:spPr>
           <a:xfrm>
-            <a:off x="180000" y="6390000"/>
-            <a:ext cx="11700000" cy="450000"/>
+            <a:off x="144000" y="6382800"/>
+            <a:ext cx="11880000" cy="457200"/>
           </a:xfrm>
           <a:prstGeom prst="rect">
             <a:avLst/>
@@ -7945,12 +7945,12 @@
           <a:p>
             <a:pPr algn="l"/>
             <a:r>
-              <a:rPr sz="1000" b="1" i="0">
+              <a:rPr sz="950" b="1" i="0">
                 <a:solidFill>
                   <a:srgbClr val="FF8C42"/>
                 </a:solidFill>
               </a:rPr>
-              <a:t>ВЫВОД: В-банк горячее А-банка на 19°C в среднем. Цил.6 достигает 594°C — КРИТИЧНО. Агрегат с известным дефектом клапана — сравнение с нормой.</a:t>
+              <a:t>ВЫВОД: В-банк горячее А-банка на 19°C.  |  Разброс: А=208°C  В=298°C.  |  Цил.6 отклонение +37°C от avg банка.</a:t>
             </a:r>
           </a:p>
         </p:txBody>
@@ -8076,7 +8076,7 @@
         <p:spPr>
           <a:xfrm>
             <a:off x="180000" y="36000"/>
-            <a:ext cx="11520000" cy="396000"/>
+            <a:ext cx="11520000" cy="360000"/>
           </a:xfrm>
           <a:prstGeom prst="rect">
             <a:avLst/>
@@ -8091,12 +8091,12 @@
           <a:p>
             <a:pPr algn="l"/>
             <a:r>
-              <a:rPr sz="1600" b="1" i="0">
+              <a:rPr sz="1500" b="1" i="0">
                 <a:solidFill>
                   <a:srgbClr val="FFFFFF"/>
                 </a:solidFill>
               </a:rPr>
-              <a:t>ТЕМПЕРАТУРА ЦИЛИНДРОВ — АГРЕГАТ #45  |  18.05.2026</a:t>
+              <a:t>ТЕМПЕРАТУРА ЦИЛИНДРОВ — NTE200 #45  |  18.05.2026</a:t>
             </a:r>
           </a:p>
         </p:txBody>
@@ -8109,8 +8109,8 @@
         </p:nvSpPr>
         <p:spPr>
           <a:xfrm>
-            <a:off x="180000" y="432000"/>
-            <a:ext cx="11520000" cy="234000"/>
+            <a:off x="180000" y="413999"/>
+            <a:ext cx="11520000" cy="251999"/>
           </a:xfrm>
           <a:prstGeom prst="rect">
             <a:avLst/>
@@ -8125,19 +8125,19 @@
           <a:p>
             <a:pPr algn="l"/>
             <a:r>
-              <a:rPr sz="950" b="0" i="0">
+              <a:rPr sz="900" b="0" i="0">
                 <a:solidFill>
                   <a:srgbClr val="667788"/>
                 </a:solidFill>
               </a:rPr>
-              <a:t>А-банк (нечётные, ECM144) — В-банк (чётные, ECM1)  |  Индивидуальные ЕГТ по цилиндрам</a:t>
+              <a:t>Δ внутри банков  |  Δ каждого цилиндра от среднего  |  Межбанковая асимметрия по времени</a:t>
             </a:r>
           </a:p>
         </p:txBody>
       </p:sp>
       <p:pic>
         <p:nvPicPr>
-          <p:cNvPr id="6" name="Picture 5" descr="tmp2ka67x5s.png"/>
+          <p:cNvPr id="6" name="Picture 5" descr="tmpb2tz5u71.png"/>
           <p:cNvPicPr>
             <a:picLocks noChangeAspect="1"/>
           </p:cNvPicPr>
@@ -8151,8 +8151,8 @@
         </p:blipFill>
         <p:spPr>
           <a:xfrm>
-            <a:off x="108000" y="756000"/>
-            <a:ext cx="11952000" cy="5580000"/>
+            <a:off x="72000" y="737999"/>
+            <a:ext cx="12045600" cy="5598000"/>
           </a:xfrm>
           <a:prstGeom prst="rect">
             <a:avLst/>
@@ -8167,8 +8167,8 @@
         </p:nvSpPr>
         <p:spPr>
           <a:xfrm>
-            <a:off x="0" y="6372000"/>
-            <a:ext cx="12189600" cy="486000"/>
+            <a:off x="0" y="6364800"/>
+            <a:ext cx="12189600" cy="493200"/>
           </a:xfrm>
           <a:prstGeom prst="rect">
             <a:avLst/>
@@ -8212,8 +8212,8 @@
         </p:nvSpPr>
         <p:spPr>
           <a:xfrm>
-            <a:off x="180000" y="6390000"/>
-            <a:ext cx="11700000" cy="450000"/>
+            <a:off x="144000" y="6382800"/>
+            <a:ext cx="11880000" cy="457200"/>
           </a:xfrm>
           <a:prstGeom prst="rect">
             <a:avLst/>
@@ -8228,12 +8228,12 @@
           <a:p>
             <a:pPr algn="l"/>
             <a:r>
-              <a:rPr sz="1000" b="1" i="0">
+              <a:rPr sz="950" b="1" i="0">
                 <a:solidFill>
                   <a:srgbClr val="FF8C42"/>
                 </a:solidFill>
               </a:rPr>
-              <a:t>ВЫВОД: В-банк горячее А-банка на 25°C в среднем. Цил.2 достигает 521°C — ВНИМАНИЕ.</a:t>
+              <a:t>ВЫВОД: В-банк горячее А-банка на 25°C.  |  Разброс: А=160°C  В=191°C.  |  Цил.2 отклонение +46°C от avg банка.</a:t>
             </a:r>
           </a:p>
         </p:txBody>
@@ -8359,7 +8359,7 @@
         <p:spPr>
           <a:xfrm>
             <a:off x="180000" y="36000"/>
-            <a:ext cx="11520000" cy="396000"/>
+            <a:ext cx="11520000" cy="360000"/>
           </a:xfrm>
           <a:prstGeom prst="rect">
             <a:avLst/>
@@ -8374,12 +8374,12 @@
           <a:p>
             <a:pPr algn="l"/>
             <a:r>
-              <a:rPr sz="1600" b="1" i="0">
+              <a:rPr sz="1500" b="1" i="0">
                 <a:solidFill>
                   <a:srgbClr val="FFFFFF"/>
                 </a:solidFill>
               </a:rPr>
-              <a:t>ТЕМПЕРАТУРА ЦИЛИНДРОВ — АГРЕГАТ #50  |  19.05.2026</a:t>
+              <a:t>ТЕМПЕРАТУРА ЦИЛИНДРОВ — NTE200 #50  |  19.05.2026</a:t>
             </a:r>
           </a:p>
         </p:txBody>
@@ -8392,8 +8392,8 @@
         </p:nvSpPr>
         <p:spPr>
           <a:xfrm>
-            <a:off x="180000" y="432000"/>
-            <a:ext cx="11520000" cy="234000"/>
+            <a:off x="180000" y="413999"/>
+            <a:ext cx="11520000" cy="251999"/>
           </a:xfrm>
           <a:prstGeom prst="rect">
             <a:avLst/>
@@ -8408,19 +8408,19 @@
           <a:p>
             <a:pPr algn="l"/>
             <a:r>
-              <a:rPr sz="950" b="0" i="0">
+              <a:rPr sz="900" b="0" i="0">
                 <a:solidFill>
                   <a:srgbClr val="667788"/>
                 </a:solidFill>
               </a:rPr>
-              <a:t>А-банк (нечётные, ECM144) — В-банк (чётные, ECM1)  |  Индивидуальные ЕГТ по цилиндрам</a:t>
+              <a:t>Δ внутри банков  |  Δ каждого цилиндра от среднего  |  Межбанковая асимметрия по времени</a:t>
             </a:r>
           </a:p>
         </p:txBody>
       </p:sp>
       <p:pic>
         <p:nvPicPr>
-          <p:cNvPr id="6" name="Picture 5" descr="tmpwh9etp7z.png"/>
+          <p:cNvPr id="6" name="Picture 5" descr="tmpibk44t_p.png"/>
           <p:cNvPicPr>
             <a:picLocks noChangeAspect="1"/>
           </p:cNvPicPr>
@@ -8434,8 +8434,8 @@
         </p:blipFill>
         <p:spPr>
           <a:xfrm>
-            <a:off x="108000" y="756000"/>
-            <a:ext cx="11952000" cy="5580000"/>
+            <a:off x="72000" y="737999"/>
+            <a:ext cx="12045600" cy="5598000"/>
           </a:xfrm>
           <a:prstGeom prst="rect">
             <a:avLst/>
@@ -8450,8 +8450,8 @@
         </p:nvSpPr>
         <p:spPr>
           <a:xfrm>
-            <a:off x="0" y="6372000"/>
-            <a:ext cx="12189600" cy="486000"/>
+            <a:off x="0" y="6364800"/>
+            <a:ext cx="12189600" cy="493200"/>
           </a:xfrm>
           <a:prstGeom prst="rect">
             <a:avLst/>
@@ -8495,8 +8495,8 @@
         </p:nvSpPr>
         <p:spPr>
           <a:xfrm>
-            <a:off x="180000" y="6390000"/>
-            <a:ext cx="11700000" cy="450000"/>
+            <a:off x="144000" y="6382800"/>
+            <a:ext cx="11880000" cy="457200"/>
           </a:xfrm>
           <a:prstGeom prst="rect">
             <a:avLst/>
@@ -8511,12 +8511,12 @@
           <a:p>
             <a:pPr algn="l"/>
             <a:r>
-              <a:rPr sz="1000" b="1" i="0">
+              <a:rPr sz="950" b="1" i="0">
                 <a:solidFill>
                   <a:srgbClr val="FF8C42"/>
                 </a:solidFill>
               </a:rPr>
-              <a:t>ВЫВОД: В-банк горячее А-банка на 13°C в среднем. Цил.10 достигает 556°C — КРИТИЧНО.</a:t>
+              <a:t>ВЫВОД: В-банк горячее А-банка на 13°C.  |  Разброс: А=277°C  В=244°C.  |  Цил.10 отклонение +20°C от avg банка.</a:t>
             </a:r>
           </a:p>
         </p:txBody>
@@ -8642,7 +8642,7 @@
         <p:spPr>
           <a:xfrm>
             <a:off x="180000" y="36000"/>
-            <a:ext cx="11520000" cy="396000"/>
+            <a:ext cx="11520000" cy="360000"/>
           </a:xfrm>
           <a:prstGeom prst="rect">
             <a:avLst/>
@@ -8657,12 +8657,12 @@
           <a:p>
             <a:pPr algn="l"/>
             <a:r>
-              <a:rPr sz="1600" b="1" i="0">
+              <a:rPr sz="1500" b="1" i="0">
                 <a:solidFill>
                   <a:srgbClr val="FFFFFF"/>
                 </a:solidFill>
               </a:rPr>
-              <a:t>ТЕМПЕРАТУРА ЦИЛИНДРОВ — АГРЕГАТ #52  |  18.05.2026</a:t>
+              <a:t>ТЕМПЕРАТУРА ЦИЛИНДРОВ — NTE200 #52  |  18.05.2026</a:t>
             </a:r>
           </a:p>
         </p:txBody>
@@ -8675,8 +8675,8 @@
         </p:nvSpPr>
         <p:spPr>
           <a:xfrm>
-            <a:off x="180000" y="432000"/>
-            <a:ext cx="11520000" cy="234000"/>
+            <a:off x="180000" y="413999"/>
+            <a:ext cx="11520000" cy="251999"/>
           </a:xfrm>
           <a:prstGeom prst="rect">
             <a:avLst/>
@@ -8691,19 +8691,19 @@
           <a:p>
             <a:pPr algn="l"/>
             <a:r>
-              <a:rPr sz="950" b="0" i="0">
+              <a:rPr sz="900" b="0" i="0">
                 <a:solidFill>
                   <a:srgbClr val="667788"/>
                 </a:solidFill>
               </a:rPr>
-              <a:t>А-банк (нечётные, ECM144) — В-банк (чётные, ECM1)  |  Индивидуальные ЕГТ по цилиндрам</a:t>
+              <a:t>Δ внутри банков  |  Δ каждого цилиндра от среднего  |  Межбанковая асимметрия по времени</a:t>
             </a:r>
           </a:p>
         </p:txBody>
       </p:sp>
       <p:pic>
         <p:nvPicPr>
-          <p:cNvPr id="6" name="Picture 5" descr="tmpmojc_8lp.png"/>
+          <p:cNvPr id="6" name="Picture 5" descr="tmprgimcido.png"/>
           <p:cNvPicPr>
             <a:picLocks noChangeAspect="1"/>
           </p:cNvPicPr>
@@ -8717,8 +8717,8 @@
         </p:blipFill>
         <p:spPr>
           <a:xfrm>
-            <a:off x="108000" y="756000"/>
-            <a:ext cx="11952000" cy="5580000"/>
+            <a:off x="72000" y="737999"/>
+            <a:ext cx="12045600" cy="5598000"/>
           </a:xfrm>
           <a:prstGeom prst="rect">
             <a:avLst/>
@@ -8733,8 +8733,8 @@
         </p:nvSpPr>
         <p:spPr>
           <a:xfrm>
-            <a:off x="0" y="6372000"/>
-            <a:ext cx="12189600" cy="486000"/>
+            <a:off x="0" y="6364800"/>
+            <a:ext cx="12189600" cy="493200"/>
           </a:xfrm>
           <a:prstGeom prst="rect">
             <a:avLst/>
@@ -8778,8 +8778,8 @@
         </p:nvSpPr>
         <p:spPr>
           <a:xfrm>
-            <a:off x="180000" y="6390000"/>
-            <a:ext cx="11700000" cy="450000"/>
+            <a:off x="144000" y="6382800"/>
+            <a:ext cx="11880000" cy="457200"/>
           </a:xfrm>
           <a:prstGeom prst="rect">
             <a:avLst/>
@@ -8794,12 +8794,12 @@
           <a:p>
             <a:pPr algn="l"/>
             <a:r>
-              <a:rPr sz="1000" b="1" i="0">
+              <a:rPr sz="950" b="1" i="0">
                 <a:solidFill>
                   <a:srgbClr val="FF8C42"/>
                 </a:solidFill>
               </a:rPr>
-              <a:t>ВЫВОД: А-банк горячее В-банка на 16°C в среднем. Цил.12 достигает 526°C — ВНИМАНИЕ.</a:t>
+              <a:t>ВЫВОД: А-банк горячее В-банка на 16°C.  |  Разброс: А=139°C  В=176°C.  |  Цил.12 отклонение +57°C от avg банка.</a:t>
             </a:r>
           </a:p>
         </p:txBody>
@@ -8925,7 +8925,7 @@
         <p:spPr>
           <a:xfrm>
             <a:off x="180000" y="36000"/>
-            <a:ext cx="11520000" cy="396000"/>
+            <a:ext cx="11520000" cy="360000"/>
           </a:xfrm>
           <a:prstGeom prst="rect">
             <a:avLst/>
@@ -8940,12 +8940,12 @@
           <a:p>
             <a:pPr algn="l"/>
             <a:r>
-              <a:rPr sz="1600" b="1" i="0">
+              <a:rPr sz="1500" b="1" i="0">
                 <a:solidFill>
                   <a:srgbClr val="FFFFFF"/>
                 </a:solidFill>
               </a:rPr>
-              <a:t>ТЕМПЕРАТУРА ЦИЛИНДРОВ — АГРЕГАТ #56  |  19.05.2026</a:t>
+              <a:t>ТЕМПЕРАТУРА ЦИЛИНДРОВ — NTE200 #56  |  19.05.2026</a:t>
             </a:r>
           </a:p>
         </p:txBody>
@@ -8958,8 +8958,8 @@
         </p:nvSpPr>
         <p:spPr>
           <a:xfrm>
-            <a:off x="180000" y="432000"/>
-            <a:ext cx="11520000" cy="234000"/>
+            <a:off x="180000" y="413999"/>
+            <a:ext cx="11520000" cy="251999"/>
           </a:xfrm>
           <a:prstGeom prst="rect">
             <a:avLst/>
@@ -8974,19 +8974,19 @@
           <a:p>
             <a:pPr algn="l"/>
             <a:r>
-              <a:rPr sz="950" b="0" i="0">
+              <a:rPr sz="900" b="0" i="0">
                 <a:solidFill>
                   <a:srgbClr val="667788"/>
                 </a:solidFill>
               </a:rPr>
-              <a:t>А-банк (нечётные, ECM144) — В-банк (чётные, ECM1)  |  Индивидуальные ЕГТ по цилиндрам</a:t>
+              <a:t>Δ внутри банков  |  Δ каждого цилиндра от среднего  |  Межбанковая асимметрия по времени</a:t>
             </a:r>
           </a:p>
         </p:txBody>
       </p:sp>
       <p:pic>
         <p:nvPicPr>
-          <p:cNvPr id="6" name="Picture 5" descr="tmpx1oigkcp.png"/>
+          <p:cNvPr id="6" name="Picture 5" descr="tmpeeqlcd6x.png"/>
           <p:cNvPicPr>
             <a:picLocks noChangeAspect="1"/>
           </p:cNvPicPr>
@@ -9000,8 +9000,8 @@
         </p:blipFill>
         <p:spPr>
           <a:xfrm>
-            <a:off x="108000" y="756000"/>
-            <a:ext cx="11952000" cy="5580000"/>
+            <a:off x="72000" y="737999"/>
+            <a:ext cx="12045600" cy="5598000"/>
           </a:xfrm>
           <a:prstGeom prst="rect">
             <a:avLst/>
@@ -9016,8 +9016,8 @@
         </p:nvSpPr>
         <p:spPr>
           <a:xfrm>
-            <a:off x="0" y="6372000"/>
-            <a:ext cx="12189600" cy="486000"/>
+            <a:off x="0" y="6364800"/>
+            <a:ext cx="12189600" cy="493200"/>
           </a:xfrm>
           <a:prstGeom prst="rect">
             <a:avLst/>
@@ -9061,8 +9061,8 @@
         </p:nvSpPr>
         <p:spPr>
           <a:xfrm>
-            <a:off x="180000" y="6390000"/>
-            <a:ext cx="11700000" cy="450000"/>
+            <a:off x="144000" y="6382800"/>
+            <a:ext cx="11880000" cy="457200"/>
           </a:xfrm>
           <a:prstGeom prst="rect">
             <a:avLst/>
@@ -9077,12 +9077,12 @@
           <a:p>
             <a:pPr algn="l"/>
             <a:r>
-              <a:rPr sz="1000" b="1" i="0">
+              <a:rPr sz="950" b="1" i="0">
                 <a:solidFill>
                   <a:srgbClr val="FF8C42"/>
                 </a:solidFill>
               </a:rPr>
-              <a:t>ВЫВОД: А-банк горячее В-банка на 17°C в среднем. Цил.11 достигает 546°C — ВНИМАНИЕ.</a:t>
+              <a:t>ВЫВОД: А-банк горячее В-банка на 17°C.  |  Разброс: А=269°C  В=277°C.  |  Цил.11 отклонение +25°C от avg банка.</a:t>
             </a:r>
           </a:p>
         </p:txBody>
@@ -9208,7 +9208,7 @@
         <p:spPr>
           <a:xfrm>
             <a:off x="180000" y="36000"/>
-            <a:ext cx="11520000" cy="396000"/>
+            <a:ext cx="11520000" cy="360000"/>
           </a:xfrm>
           <a:prstGeom prst="rect">
             <a:avLst/>
@@ -9223,12 +9223,12 @@
           <a:p>
             <a:pPr algn="l"/>
             <a:r>
-              <a:rPr sz="1600" b="1" i="0">
+              <a:rPr sz="1500" b="1" i="0">
                 <a:solidFill>
                   <a:srgbClr val="FFFFFF"/>
                 </a:solidFill>
               </a:rPr>
-              <a:t>ТЕМПЕРАТУРА ЦИЛИНДРОВ — АГРЕГАТ #84 (16.05)  |  16.05.2026</a:t>
+              <a:t>ТЕМПЕРАТУРА ЦИЛИНДРОВ — NTE200 #84 (16.05)  |  16.05.2026</a:t>
             </a:r>
           </a:p>
         </p:txBody>
@@ -9241,8 +9241,8 @@
         </p:nvSpPr>
         <p:spPr>
           <a:xfrm>
-            <a:off x="180000" y="432000"/>
-            <a:ext cx="11520000" cy="234000"/>
+            <a:off x="180000" y="413999"/>
+            <a:ext cx="11520000" cy="251999"/>
           </a:xfrm>
           <a:prstGeom prst="rect">
             <a:avLst/>
@@ -9257,19 +9257,19 @@
           <a:p>
             <a:pPr algn="l"/>
             <a:r>
-              <a:rPr sz="950" b="0" i="0">
+              <a:rPr sz="900" b="0" i="0">
                 <a:solidFill>
                   <a:srgbClr val="667788"/>
                 </a:solidFill>
               </a:rPr>
-              <a:t>А-банк (нечётные, ECM144) — В-банк (чётные, ECM1)  |  Индивидуальные ЕГТ по цилиндрам</a:t>
+              <a:t>Δ внутри банков  |  Δ каждого цилиндра от среднего  |  Межбанковая асимметрия по времени</a:t>
             </a:r>
           </a:p>
         </p:txBody>
       </p:sp>
       <p:pic>
         <p:nvPicPr>
-          <p:cNvPr id="6" name="Picture 5" descr="tmpk5qx17f1.png"/>
+          <p:cNvPr id="6" name="Picture 5" descr="tmp9shk9_vf.png"/>
           <p:cNvPicPr>
             <a:picLocks noChangeAspect="1"/>
           </p:cNvPicPr>
@@ -9283,8 +9283,8 @@
         </p:blipFill>
         <p:spPr>
           <a:xfrm>
-            <a:off x="108000" y="756000"/>
-            <a:ext cx="11952000" cy="5580000"/>
+            <a:off x="72000" y="737999"/>
+            <a:ext cx="12045600" cy="5598000"/>
           </a:xfrm>
           <a:prstGeom prst="rect">
             <a:avLst/>
@@ -9299,8 +9299,8 @@
         </p:nvSpPr>
         <p:spPr>
           <a:xfrm>
-            <a:off x="0" y="6372000"/>
-            <a:ext cx="12189600" cy="486000"/>
+            <a:off x="0" y="6364800"/>
+            <a:ext cx="12189600" cy="493200"/>
           </a:xfrm>
           <a:prstGeom prst="rect">
             <a:avLst/>
@@ -9344,8 +9344,8 @@
         </p:nvSpPr>
         <p:spPr>
           <a:xfrm>
-            <a:off x="180000" y="6390000"/>
-            <a:ext cx="11700000" cy="450000"/>
+            <a:off x="144000" y="6382800"/>
+            <a:ext cx="11880000" cy="457200"/>
           </a:xfrm>
           <a:prstGeom prst="rect">
             <a:avLst/>
@@ -9360,12 +9360,12 @@
           <a:p>
             <a:pPr algn="l"/>
             <a:r>
-              <a:rPr sz="1000" b="1" i="0">
+              <a:rPr sz="950" b="1" i="0">
                 <a:solidFill>
                   <a:srgbClr val="FF8C42"/>
                 </a:solidFill>
               </a:rPr>
-              <a:t>ВЫВОД: Банки температурно симметричны. Цил.6 достигает 528°C — ВНИМАНИЕ.</a:t>
+              <a:t>ВЫВОД: Банки симметричны.  |  Разброс: А=166°C  В=183°C.  |  Цил.6 отклонение +26°C от avg банка.</a:t>
             </a:r>
           </a:p>
         </p:txBody>
@@ -15340,7 +15340,7 @@
         <p:spPr>
           <a:xfrm>
             <a:off x="180000" y="36000"/>
-            <a:ext cx="11520000" cy="396000"/>
+            <a:ext cx="11520000" cy="360000"/>
           </a:xfrm>
           <a:prstGeom prst="rect">
             <a:avLst/>
@@ -15355,12 +15355,12 @@
           <a:p>
             <a:pPr algn="l"/>
             <a:r>
-              <a:rPr sz="1600" b="1" i="0">
+              <a:rPr sz="1500" b="1" i="0">
                 <a:solidFill>
                   <a:srgbClr val="FFFFFF"/>
                 </a:solidFill>
               </a:rPr>
-              <a:t>ТЕМПЕРАТУРА ЦИЛИНДРОВ — АГРЕГАТ #84 (21.05)  |  21.05.2026</a:t>
+              <a:t>ТЕМПЕРАТУРА ЦИЛИНДРОВ — NTE200 #84 (21.05)  |  21.05.2026</a:t>
             </a:r>
           </a:p>
         </p:txBody>
@@ -15373,8 +15373,8 @@
         </p:nvSpPr>
         <p:spPr>
           <a:xfrm>
-            <a:off x="180000" y="432000"/>
-            <a:ext cx="11520000" cy="234000"/>
+            <a:off x="180000" y="413999"/>
+            <a:ext cx="11520000" cy="251999"/>
           </a:xfrm>
           <a:prstGeom prst="rect">
             <a:avLst/>
@@ -15389,19 +15389,19 @@
           <a:p>
             <a:pPr algn="l"/>
             <a:r>
-              <a:rPr sz="950" b="0" i="0">
+              <a:rPr sz="900" b="0" i="0">
                 <a:solidFill>
                   <a:srgbClr val="667788"/>
                 </a:solidFill>
               </a:rPr>
-              <a:t>А-банк (нечётные, ECM144) — В-банк (чётные, ECM1)  |  Индивидуальные ЕГТ по цилиндрам</a:t>
+              <a:t>Δ внутри банков  |  Δ каждого цилиндра от среднего  |  Межбанковая асимметрия по времени</a:t>
             </a:r>
           </a:p>
         </p:txBody>
       </p:sp>
       <p:pic>
         <p:nvPicPr>
-          <p:cNvPr id="6" name="Picture 5" descr="tmplfva8p4_.png"/>
+          <p:cNvPr id="6" name="Picture 5" descr="tmp2p61_s1n.png"/>
           <p:cNvPicPr>
             <a:picLocks noChangeAspect="1"/>
           </p:cNvPicPr>
@@ -15415,8 +15415,8 @@
         </p:blipFill>
         <p:spPr>
           <a:xfrm>
-            <a:off x="108000" y="756000"/>
-            <a:ext cx="11952000" cy="5580000"/>
+            <a:off x="72000" y="737999"/>
+            <a:ext cx="12045600" cy="5598000"/>
           </a:xfrm>
           <a:prstGeom prst="rect">
             <a:avLst/>
@@ -15431,8 +15431,8 @@
         </p:nvSpPr>
         <p:spPr>
           <a:xfrm>
-            <a:off x="0" y="6372000"/>
-            <a:ext cx="12189600" cy="486000"/>
+            <a:off x="0" y="6364800"/>
+            <a:ext cx="12189600" cy="493200"/>
           </a:xfrm>
           <a:prstGeom prst="rect">
             <a:avLst/>
@@ -15476,8 +15476,8 @@
         </p:nvSpPr>
         <p:spPr>
           <a:xfrm>
-            <a:off x="180000" y="6390000"/>
-            <a:ext cx="11700000" cy="450000"/>
+            <a:off x="144000" y="6382800"/>
+            <a:ext cx="11880000" cy="457200"/>
           </a:xfrm>
           <a:prstGeom prst="rect">
             <a:avLst/>
@@ -15492,12 +15492,12 @@
           <a:p>
             <a:pPr algn="l"/>
             <a:r>
-              <a:rPr sz="1000" b="1" i="0">
+              <a:rPr sz="950" b="1" i="0">
                 <a:solidFill>
                   <a:srgbClr val="FF8C42"/>
                 </a:solidFill>
               </a:rPr>
-              <a:t>ВЫВОД: Банки температурно симметричны. Цил.6 достигает 538°C — ВНИМАНИЕ.</a:t>
+              <a:t>ВЫВОД: Банки симметричны.  |  Разброс: А=264°C  В=291°C.  |  Цил.6 отклонение +30°C от avg банка.</a:t>
             </a:r>
           </a:p>
         </p:txBody>
@@ -15623,7 +15623,7 @@
         <p:spPr>
           <a:xfrm>
             <a:off x="180000" y="36000"/>
-            <a:ext cx="11520000" cy="396000"/>
+            <a:ext cx="11520000" cy="360000"/>
           </a:xfrm>
           <a:prstGeom prst="rect">
             <a:avLst/>
@@ -15638,12 +15638,12 @@
           <a:p>
             <a:pPr algn="l"/>
             <a:r>
-              <a:rPr sz="1600" b="1" i="0">
+              <a:rPr sz="1500" b="1" i="0">
                 <a:solidFill>
                   <a:srgbClr val="FFFFFF"/>
                 </a:solidFill>
               </a:rPr>
-              <a:t>ТЕМПЕРАТУРА ЦИЛИНДРОВ — АГРЕГАТ #85  |  19.05.2026</a:t>
+              <a:t>ТЕМПЕРАТУРА ЦИЛИНДРОВ — NTE200 #85  |  19.05.2026</a:t>
             </a:r>
           </a:p>
         </p:txBody>
@@ -15656,8 +15656,8 @@
         </p:nvSpPr>
         <p:spPr>
           <a:xfrm>
-            <a:off x="180000" y="432000"/>
-            <a:ext cx="11520000" cy="234000"/>
+            <a:off x="180000" y="413999"/>
+            <a:ext cx="11520000" cy="251999"/>
           </a:xfrm>
           <a:prstGeom prst="rect">
             <a:avLst/>
@@ -15672,19 +15672,19 @@
           <a:p>
             <a:pPr algn="l"/>
             <a:r>
-              <a:rPr sz="950" b="0" i="0">
+              <a:rPr sz="900" b="0" i="0">
                 <a:solidFill>
                   <a:srgbClr val="667788"/>
                 </a:solidFill>
               </a:rPr>
-              <a:t>А-банк (нечётные, ECM144) — В-банк (чётные, ECM1)  |  Индивидуальные ЕГТ по цилиндрам</a:t>
+              <a:t>Δ внутри банков  |  Δ каждого цилиндра от среднего  |  Межбанковая асимметрия по времени</a:t>
             </a:r>
           </a:p>
         </p:txBody>
       </p:sp>
       <p:pic>
         <p:nvPicPr>
-          <p:cNvPr id="6" name="Picture 5" descr="tmpokyh4mcv.png"/>
+          <p:cNvPr id="6" name="Picture 5" descr="tmpyahsh35i.png"/>
           <p:cNvPicPr>
             <a:picLocks noChangeAspect="1"/>
           </p:cNvPicPr>
@@ -15698,8 +15698,8 @@
         </p:blipFill>
         <p:spPr>
           <a:xfrm>
-            <a:off x="108000" y="756000"/>
-            <a:ext cx="11952000" cy="5580000"/>
+            <a:off x="72000" y="737999"/>
+            <a:ext cx="12045600" cy="5598000"/>
           </a:xfrm>
           <a:prstGeom prst="rect">
             <a:avLst/>
@@ -15714,8 +15714,8 @@
         </p:nvSpPr>
         <p:spPr>
           <a:xfrm>
-            <a:off x="0" y="6372000"/>
-            <a:ext cx="12189600" cy="486000"/>
+            <a:off x="0" y="6364800"/>
+            <a:ext cx="12189600" cy="493200"/>
           </a:xfrm>
           <a:prstGeom prst="rect">
             <a:avLst/>
@@ -15759,8 +15759,8 @@
         </p:nvSpPr>
         <p:spPr>
           <a:xfrm>
-            <a:off x="180000" y="6390000"/>
-            <a:ext cx="11700000" cy="450000"/>
+            <a:off x="144000" y="6382800"/>
+            <a:ext cx="11880000" cy="457200"/>
           </a:xfrm>
           <a:prstGeom prst="rect">
             <a:avLst/>
@@ -15775,12 +15775,12 @@
           <a:p>
             <a:pPr algn="l"/>
             <a:r>
-              <a:rPr sz="1000" b="1" i="0">
+              <a:rPr sz="950" b="1" i="0">
                 <a:solidFill>
                   <a:srgbClr val="FF8C42"/>
                 </a:solidFill>
               </a:rPr>
-              <a:t>ВЫВОД: Банки температурно симметричны. Цил.6 достигает 606°C — КРИТИЧНО.</a:t>
+              <a:t>ВЫВОД: Банки симметричны.  |  Разброс: А=372°C  В=383°C.  |  Цил.6 отклонение +29°C от avg банка.</a:t>
             </a:r>
           </a:p>
         </p:txBody>
@@ -15906,7 +15906,7 @@
         <p:spPr>
           <a:xfrm>
             <a:off x="180000" y="36000"/>
-            <a:ext cx="11520000" cy="396000"/>
+            <a:ext cx="11520000" cy="360000"/>
           </a:xfrm>
           <a:prstGeom prst="rect">
             <a:avLst/>
@@ -15921,12 +15921,12 @@
           <a:p>
             <a:pPr algn="l"/>
             <a:r>
-              <a:rPr sz="1600" b="1" i="0">
+              <a:rPr sz="1500" b="1" i="0">
                 <a:solidFill>
                   <a:srgbClr val="FFFFFF"/>
                 </a:solidFill>
               </a:rPr>
-              <a:t>ТЕМПЕРАТУРА ЦИЛИНДРОВ — АГРЕГАТ #87  |  21.05.2026</a:t>
+              <a:t>ТЕМПЕРАТУРА ЦИЛИНДРОВ — NTE200 #87  |  21.05.2026</a:t>
             </a:r>
           </a:p>
         </p:txBody>
@@ -15939,8 +15939,8 @@
         </p:nvSpPr>
         <p:spPr>
           <a:xfrm>
-            <a:off x="180000" y="432000"/>
-            <a:ext cx="11520000" cy="234000"/>
+            <a:off x="180000" y="413999"/>
+            <a:ext cx="11520000" cy="251999"/>
           </a:xfrm>
           <a:prstGeom prst="rect">
             <a:avLst/>
@@ -15955,19 +15955,19 @@
           <a:p>
             <a:pPr algn="l"/>
             <a:r>
-              <a:rPr sz="950" b="0" i="0">
+              <a:rPr sz="900" b="0" i="0">
                 <a:solidFill>
                   <a:srgbClr val="667788"/>
                 </a:solidFill>
               </a:rPr>
-              <a:t>А-банк (нечётные, ECM144) — В-банк (чётные, ECM1)  |  Индивидуальные ЕГТ по цилиндрам</a:t>
+              <a:t>Δ внутри банков  |  Δ каждого цилиндра от среднего  |  Межбанковая асимметрия по времени</a:t>
             </a:r>
           </a:p>
         </p:txBody>
       </p:sp>
       <p:pic>
         <p:nvPicPr>
-          <p:cNvPr id="6" name="Picture 5" descr="tmpzs_bprnl.png"/>
+          <p:cNvPr id="6" name="Picture 5" descr="tmpzkmx4ooq.png"/>
           <p:cNvPicPr>
             <a:picLocks noChangeAspect="1"/>
           </p:cNvPicPr>
@@ -15981,8 +15981,8 @@
         </p:blipFill>
         <p:spPr>
           <a:xfrm>
-            <a:off x="108000" y="756000"/>
-            <a:ext cx="11952000" cy="5580000"/>
+            <a:off x="72000" y="737999"/>
+            <a:ext cx="12045600" cy="5598000"/>
           </a:xfrm>
           <a:prstGeom prst="rect">
             <a:avLst/>
@@ -15997,8 +15997,8 @@
         </p:nvSpPr>
         <p:spPr>
           <a:xfrm>
-            <a:off x="0" y="6372000"/>
-            <a:ext cx="12189600" cy="486000"/>
+            <a:off x="0" y="6364800"/>
+            <a:ext cx="12189600" cy="493200"/>
           </a:xfrm>
           <a:prstGeom prst="rect">
             <a:avLst/>
@@ -16042,8 +16042,8 @@
         </p:nvSpPr>
         <p:spPr>
           <a:xfrm>
-            <a:off x="180000" y="6390000"/>
-            <a:ext cx="11700000" cy="450000"/>
+            <a:off x="144000" y="6382800"/>
+            <a:ext cx="11880000" cy="457200"/>
           </a:xfrm>
           <a:prstGeom prst="rect">
             <a:avLst/>
@@ -16058,12 +16058,12 @@
           <a:p>
             <a:pPr algn="l"/>
             <a:r>
-              <a:rPr sz="1000" b="1" i="0">
+              <a:rPr sz="950" b="1" i="0">
                 <a:solidFill>
                   <a:srgbClr val="FF8C42"/>
                 </a:solidFill>
               </a:rPr>
-              <a:t>ВЫВОД: А-банк горячее В-банка на 17°C в среднем. Цил.1 достигает 550°C — КРИТИЧНО.</a:t>
+              <a:t>ВЫВОД: А-банк горячее В-банка на 17°C.  |  Разброс: А=360°C  В=382°C.  |  Цил.6 отклонение +35°C от avg банка.</a:t>
             </a:r>
           </a:p>
         </p:txBody>
@@ -16330,7 +16330,7 @@
       </p:sp>
       <p:pic>
         <p:nvPicPr>
-          <p:cNvPr id="8" name="Picture 7" descr="tmpuw25231j.png"/>
+          <p:cNvPr id="8" name="Picture 7" descr="tmpcam9b0db.png"/>
           <p:cNvPicPr>
             <a:picLocks noChangeAspect="1"/>
           </p:cNvPicPr>
@@ -16614,7 +16614,7 @@
       </p:sp>
       <p:pic>
         <p:nvPicPr>
-          <p:cNvPr id="8" name="Picture 7" descr="tmpc7v1u_mn.png"/>
+          <p:cNvPr id="8" name="Picture 7" descr="tmpedwvmour.png"/>
           <p:cNvPicPr>
             <a:picLocks noChangeAspect="1"/>
           </p:cNvPicPr>
@@ -16898,7 +16898,7 @@
       </p:sp>
       <p:pic>
         <p:nvPicPr>
-          <p:cNvPr id="8" name="Picture 7" descr="tmpep3_o8ma.png"/>
+          <p:cNvPr id="8" name="Picture 7" descr="tmpdi8s75st.png"/>
           <p:cNvPicPr>
             <a:picLocks noChangeAspect="1"/>
           </p:cNvPicPr>
@@ -17182,7 +17182,7 @@
       </p:sp>
       <p:pic>
         <p:nvPicPr>
-          <p:cNvPr id="8" name="Picture 7" descr="tmp8a7p6jts.png"/>
+          <p:cNvPr id="8" name="Picture 7" descr="tmpw7ecf43k.png"/>
           <p:cNvPicPr>
             <a:picLocks noChangeAspect="1"/>
           </p:cNvPicPr>
@@ -17466,7 +17466,7 @@
       </p:sp>
       <p:pic>
         <p:nvPicPr>
-          <p:cNvPr id="8" name="Picture 7" descr="tmpjthqtx84.png"/>
+          <p:cNvPr id="8" name="Picture 7" descr="tmpphoa7to9.png"/>
           <p:cNvPicPr>
             <a:picLocks noChangeAspect="1"/>
           </p:cNvPicPr>
@@ -17750,7 +17750,7 @@
       </p:sp>
       <p:pic>
         <p:nvPicPr>
-          <p:cNvPr id="8" name="Picture 7" descr="tmpgz10bvqr.png"/>
+          <p:cNvPr id="8" name="Picture 7" descr="tmps6ptdc0e.png"/>
           <p:cNvPicPr>
             <a:picLocks noChangeAspect="1"/>
           </p:cNvPicPr>
@@ -18034,7 +18034,7 @@
       </p:sp>
       <p:pic>
         <p:nvPicPr>
-          <p:cNvPr id="8" name="Picture 7" descr="tmp31amle3w.png"/>
+          <p:cNvPr id="8" name="Picture 7" descr="tmpdbdc9n4c.png"/>
           <p:cNvPicPr>
             <a:picLocks noChangeAspect="1"/>
           </p:cNvPicPr>
